--- a/output/wordlabs-ful-suffix-3day.pptx
+++ b/output/wordlabs-ful-suffix-3day.pptx
@@ -6040,7 +6040,7 @@
                 <a:ea typeface="Calibri" pitchFamily="34" charset="-122"/>
                 <a:cs typeface="Calibri" pitchFamily="34" charset="-120"/>
               </a:rPr>
-              <a:t>The </a:t>
+              <a:t>She was </a:t>
             </a:r>
             <a:pPr algn="l" indent="0" marL="0">
               <a:buNone/>
@@ -6057,7 +6057,7 @@
                 <a:ea typeface="Calibri" pitchFamily="34" charset="-122"/>
                 <a:cs typeface="Calibri" pitchFamily="34" charset="-120"/>
               </a:rPr>
-              <a:t>thankful</a:t>
+              <a:t>hopeful</a:t>
             </a:r>
             <a:pPr algn="l" indent="0" marL="0">
               <a:buNone/>
@@ -6071,7 +6071,7 @@
                 <a:ea typeface="Calibri" pitchFamily="34" charset="-122"/>
                 <a:cs typeface="Calibri" pitchFamily="34" charset="-120"/>
               </a:rPr>
-              <a:t> students wrote a </a:t>
+              <a:t> that the </a:t>
             </a:r>
             <a:pPr algn="l" indent="0" marL="0">
               <a:buNone/>
@@ -6088,7 +6088,7 @@
                 <a:ea typeface="Calibri" pitchFamily="34" charset="-122"/>
                 <a:cs typeface="Calibri" pitchFamily="34" charset="-120"/>
               </a:rPr>
-              <a:t>wonderful</a:t>
+              <a:t>grateful</a:t>
             </a:r>
             <a:pPr algn="l" indent="0" marL="0">
               <a:buNone/>
@@ -6102,7 +6102,7 @@
                 <a:ea typeface="Calibri" pitchFamily="34" charset="-122"/>
                 <a:cs typeface="Calibri" pitchFamily="34" charset="-120"/>
               </a:rPr>
-              <a:t> card for their teacher.</a:t>
+              <a:t> crowd would enjoy the performance.</a:t>
             </a:r>
             <a:endParaRPr lang="en-US" sz="1800" dirty="0"/>
           </a:p>
@@ -6257,7 +6257,7 @@
                 <a:ea typeface="Trebuchet MS" pitchFamily="34" charset="-122"/>
                 <a:cs typeface="Trebuchet MS" pitchFamily="34" charset="-120"/>
               </a:rPr>
-              <a:t>thankful</a:t>
+              <a:t>hopeful</a:t>
             </a:r>
             <a:endParaRPr lang="en-US" sz="1400" dirty="0"/>
           </a:p>
@@ -6385,7 +6385,7 @@
                 <a:ea typeface="Trebuchet MS" pitchFamily="34" charset="-122"/>
                 <a:cs typeface="Trebuchet MS" pitchFamily="34" charset="-120"/>
               </a:rPr>
-              <a:t>wonderful</a:t>
+              <a:t>grateful</a:t>
             </a:r>
             <a:endParaRPr lang="en-US" sz="1400" dirty="0"/>
           </a:p>
@@ -6855,7 +6855,7 @@
                 <a:ea typeface="Trebuchet MS" pitchFamily="34" charset="-122"/>
                 <a:cs typeface="Trebuchet MS" pitchFamily="34" charset="-120"/>
               </a:rPr>
-              <a:t>thankful</a:t>
+              <a:t>hopeful</a:t>
             </a:r>
             <a:endParaRPr lang="en-US" sz="2800" dirty="0"/>
           </a:p>
@@ -7682,7 +7682,7 @@
                 <a:ea typeface="Trebuchet MS" pitchFamily="34" charset="-122"/>
                 <a:cs typeface="Trebuchet MS" pitchFamily="34" charset="-120"/>
               </a:rPr>
-              <a:t>thankful</a:t>
+              <a:t>hopeful</a:t>
             </a:r>
             <a:endParaRPr lang="en-US" sz="2800" dirty="0"/>
           </a:p>
@@ -7821,7 +7821,7 @@
                 <a:ea typeface="Trebuchet MS" pitchFamily="34" charset="-122"/>
                 <a:cs typeface="Trebuchet MS" pitchFamily="34" charset="-120"/>
               </a:rPr>
-              <a:t>thank</a:t>
+              <a:t>hope</a:t>
             </a:r>
             <a:endParaRPr lang="en-US" sz="1300" dirty="0"/>
           </a:p>
@@ -7860,7 +7860,7 @@
                 <a:ea typeface="Calibri" pitchFamily="34" charset="-122"/>
                 <a:cs typeface="Calibri" pitchFamily="34" charset="-120"/>
               </a:rPr>
-              <a:t>to express gratitude</a:t>
+              <a:t>to wish for something good</a:t>
             </a:r>
             <a:endParaRPr lang="en-US" sz="850" dirty="0"/>
           </a:p>
@@ -7972,7 +7972,7 @@
                 <a:ea typeface="Calibri" pitchFamily="34" charset="-122"/>
                 <a:cs typeface="Calibri" pitchFamily="34" charset="-120"/>
               </a:rPr>
-              <a:t>full of</a:t>
+              <a:t>full of, having quality</a:t>
             </a:r>
             <a:endParaRPr lang="en-US" sz="850" dirty="0"/>
           </a:p>
@@ -8667,7 +8667,7 @@
                 <a:ea typeface="Trebuchet MS" pitchFamily="34" charset="-122"/>
                 <a:cs typeface="Trebuchet MS" pitchFamily="34" charset="-120"/>
               </a:rPr>
-              <a:t>thankful</a:t>
+              <a:t>hopeful</a:t>
             </a:r>
             <a:endParaRPr lang="en-US" sz="2800" dirty="0"/>
           </a:p>
@@ -8806,7 +8806,7 @@
                 <a:ea typeface="Trebuchet MS" pitchFamily="34" charset="-122"/>
                 <a:cs typeface="Trebuchet MS" pitchFamily="34" charset="-120"/>
               </a:rPr>
-              <a:t>thank</a:t>
+              <a:t>hope</a:t>
             </a:r>
             <a:endParaRPr lang="en-US" sz="1300" dirty="0"/>
           </a:p>
@@ -8845,7 +8845,7 @@
                 <a:ea typeface="Calibri" pitchFamily="34" charset="-122"/>
                 <a:cs typeface="Calibri" pitchFamily="34" charset="-120"/>
               </a:rPr>
-              <a:t>to express gratitude</a:t>
+              <a:t>to wish for something good</a:t>
             </a:r>
             <a:endParaRPr lang="en-US" sz="850" dirty="0"/>
           </a:p>
@@ -8957,7 +8957,7 @@
                 <a:ea typeface="Calibri" pitchFamily="34" charset="-122"/>
                 <a:cs typeface="Calibri" pitchFamily="34" charset="-120"/>
               </a:rPr>
-              <a:t>full of</a:t>
+              <a:t>full of, having quality</a:t>
             </a:r>
             <a:endParaRPr lang="en-US" sz="850" dirty="0"/>
           </a:p>
@@ -9116,7 +9116,7 @@
                 <a:ea typeface="Trebuchet MS" pitchFamily="34" charset="-122"/>
                 <a:cs typeface="Trebuchet MS" pitchFamily="34" charset="-120"/>
               </a:rPr>
-              <a:t>thank</a:t>
+              <a:t>hope</a:t>
             </a:r>
             <a:endParaRPr lang="en-US" sz="1400" dirty="0"/>
           </a:p>
@@ -9784,7 +9784,7 @@
                 <a:ea typeface="Trebuchet MS" pitchFamily="34" charset="-122"/>
                 <a:cs typeface="Trebuchet MS" pitchFamily="34" charset="-120"/>
               </a:rPr>
-              <a:t>thankful</a:t>
+              <a:t>hopeful</a:t>
             </a:r>
             <a:endParaRPr lang="en-US" sz="2800" dirty="0"/>
           </a:p>
@@ -9923,7 +9923,7 @@
                 <a:ea typeface="Trebuchet MS" pitchFamily="34" charset="-122"/>
                 <a:cs typeface="Trebuchet MS" pitchFamily="34" charset="-120"/>
               </a:rPr>
-              <a:t>thank</a:t>
+              <a:t>hope</a:t>
             </a:r>
             <a:endParaRPr lang="en-US" sz="1300" dirty="0"/>
           </a:p>
@@ -9962,7 +9962,7 @@
                 <a:ea typeface="Calibri" pitchFamily="34" charset="-122"/>
                 <a:cs typeface="Calibri" pitchFamily="34" charset="-120"/>
               </a:rPr>
-              <a:t>to express gratitude</a:t>
+              <a:t>to wish for something good</a:t>
             </a:r>
             <a:endParaRPr lang="en-US" sz="850" dirty="0"/>
           </a:p>
@@ -10074,7 +10074,7 @@
                 <a:ea typeface="Calibri" pitchFamily="34" charset="-122"/>
                 <a:cs typeface="Calibri" pitchFamily="34" charset="-120"/>
               </a:rPr>
-              <a:t>full of</a:t>
+              <a:t>full of, having quality</a:t>
             </a:r>
             <a:endParaRPr lang="en-US" sz="850" dirty="0"/>
           </a:p>
@@ -10233,7 +10233,7 @@
                 <a:ea typeface="Trebuchet MS" pitchFamily="34" charset="-122"/>
                 <a:cs typeface="Trebuchet MS" pitchFamily="34" charset="-120"/>
               </a:rPr>
-              <a:t>thank</a:t>
+              <a:t>hope</a:t>
             </a:r>
             <a:endParaRPr lang="en-US" sz="1400" dirty="0"/>
           </a:p>
@@ -10419,11 +10419,11 @@
         <p:spPr>
           <a:xfrm>
             <a:off x="1874520" y="4096512"/>
-            <a:ext cx="6903720" cy="658368"/>
+            <a:ext cx="6903720" cy="804672"/>
           </a:xfrm>
           <a:prstGeom prst="rect">
             <a:avLst>
-              <a:gd name="adj" fmla="val 8333"/>
+              <a:gd name="adj" fmla="val 6818"/>
             </a:avLst>
           </a:prstGeom>
           <a:solidFill>
@@ -10446,11 +10446,11 @@
         <p:spPr>
           <a:xfrm>
             <a:off x="2124837" y="4169664"/>
-            <a:ext cx="685800" cy="475488"/>
+            <a:ext cx="685800" cy="384048"/>
           </a:xfrm>
           <a:prstGeom prst="rect">
             <a:avLst>
-              <a:gd name="adj" fmla="val 7692"/>
+              <a:gd name="adj" fmla="val 9524"/>
             </a:avLst>
           </a:prstGeom>
           <a:solidFill>
@@ -10473,7 +10473,7 @@
         <p:spPr>
           <a:xfrm>
             <a:off x="2124837" y="4169664"/>
-            <a:ext cx="685800" cy="475488"/>
+            <a:ext cx="685800" cy="384048"/>
           </a:xfrm>
           <a:prstGeom prst="rect">
             <a:avLst/>
@@ -10497,7 +10497,7 @@
                 <a:ea typeface="Trebuchet MS" pitchFamily="34" charset="-122"/>
                 <a:cs typeface="Trebuchet MS" pitchFamily="34" charset="-120"/>
               </a:rPr>
-              <a:t>th</a:t>
+              <a:t>h</a:t>
             </a:r>
             <a:endParaRPr lang="en-US" sz="900" dirty="0"/>
           </a:p>
@@ -10512,11 +10512,11 @@
         <p:spPr>
           <a:xfrm>
             <a:off x="3033522" y="4169664"/>
-            <a:ext cx="685800" cy="475488"/>
+            <a:ext cx="685800" cy="384048"/>
           </a:xfrm>
           <a:prstGeom prst="rect">
             <a:avLst>
-              <a:gd name="adj" fmla="val 7692"/>
+              <a:gd name="adj" fmla="val 9524"/>
             </a:avLst>
           </a:prstGeom>
           <a:solidFill>
@@ -10539,7 +10539,7 @@
         <p:spPr>
           <a:xfrm>
             <a:off x="3033522" y="4169664"/>
-            <a:ext cx="685800" cy="475488"/>
+            <a:ext cx="685800" cy="384048"/>
           </a:xfrm>
           <a:prstGeom prst="rect">
             <a:avLst/>
@@ -10563,7 +10563,7 @@
                 <a:ea typeface="Trebuchet MS" pitchFamily="34" charset="-122"/>
                 <a:cs typeface="Trebuchet MS" pitchFamily="34" charset="-120"/>
               </a:rPr>
-              <a:t>a</a:t>
+              <a:t>o</a:t>
             </a:r>
             <a:endParaRPr lang="en-US" sz="900" dirty="0"/>
           </a:p>
@@ -10571,18 +10571,57 @@
       </p:sp>
       <p:sp>
         <p:nvSpPr>
-          <p:cNvPr id="37" name="Shape 35"/>
+          <p:cNvPr id="37" name="Text 35"/>
+          <p:cNvSpPr/>
+          <p:nvPr/>
+        </p:nvSpPr>
+        <p:spPr>
+          <a:xfrm>
+            <a:off x="3033522" y="4572000"/>
+            <a:ext cx="685800" cy="219456"/>
+          </a:xfrm>
+          <a:prstGeom prst="rect">
+            <a:avLst/>
+          </a:prstGeom>
+          <a:noFill/>
+          <a:ln/>
+        </p:spPr>
+        <p:txBody>
+          <a:bodyPr wrap="square" lIns="0" tIns="0" rIns="0" bIns="0" rtlCol="0" anchor="t"/>
+          <a:lstStyle/>
+          <a:p>
+            <a:pPr algn="ctr" indent="0" marL="0">
+              <a:buNone/>
+            </a:pPr>
+            <a:r>
+              <a:rPr lang="en-US" sz="750" i="1" dirty="0">
+                <a:solidFill>
+                  <a:srgbClr val="94A3B8"/>
+                </a:solidFill>
+                <a:latin typeface="Calibri" pitchFamily="34" charset="0"/>
+                <a:ea typeface="Calibri" pitchFamily="34" charset="-122"/>
+                <a:cs typeface="Calibri" pitchFamily="34" charset="-120"/>
+              </a:rPr>
+              <a:t>/oh/</a:t>
+            </a:r>
+            <a:endParaRPr lang="en-US" sz="750" dirty="0"/>
+          </a:p>
+        </p:txBody>
+      </p:sp>
+      <p:sp>
+        <p:nvSpPr>
+          <p:cNvPr id="38" name="Shape 36"/>
           <p:cNvSpPr/>
           <p:nvPr/>
         </p:nvSpPr>
         <p:spPr>
           <a:xfrm>
             <a:off x="3942207" y="4169664"/>
-            <a:ext cx="685800" cy="475488"/>
+            <a:ext cx="685800" cy="384048"/>
           </a:xfrm>
           <a:prstGeom prst="rect">
             <a:avLst>
-              <a:gd name="adj" fmla="val 7692"/>
+              <a:gd name="adj" fmla="val 9524"/>
             </a:avLst>
           </a:prstGeom>
           <a:solidFill>
@@ -10598,14 +10637,14 @@
       </p:sp>
       <p:sp>
         <p:nvSpPr>
-          <p:cNvPr id="38" name="Text 36"/>
+          <p:cNvPr id="39" name="Text 37"/>
           <p:cNvSpPr/>
           <p:nvPr/>
         </p:nvSpPr>
         <p:spPr>
           <a:xfrm>
             <a:off x="3942207" y="4169664"/>
-            <a:ext cx="685800" cy="475488"/>
+            <a:ext cx="685800" cy="384048"/>
           </a:xfrm>
           <a:prstGeom prst="rect">
             <a:avLst/>
@@ -10629,7 +10668,7 @@
                 <a:ea typeface="Trebuchet MS" pitchFamily="34" charset="-122"/>
                 <a:cs typeface="Trebuchet MS" pitchFamily="34" charset="-120"/>
               </a:rPr>
-              <a:t>n</a:t>
+              <a:t>p</a:t>
             </a:r>
             <a:endParaRPr lang="en-US" sz="900" dirty="0"/>
           </a:p>
@@ -10637,18 +10676,18 @@
       </p:sp>
       <p:sp>
         <p:nvSpPr>
-          <p:cNvPr id="39" name="Shape 37"/>
+          <p:cNvPr id="40" name="Shape 38"/>
           <p:cNvSpPr/>
           <p:nvPr/>
         </p:nvSpPr>
         <p:spPr>
           <a:xfrm>
             <a:off x="4850892" y="4169664"/>
-            <a:ext cx="685800" cy="475488"/>
+            <a:ext cx="685800" cy="384048"/>
           </a:xfrm>
           <a:prstGeom prst="rect">
             <a:avLst>
-              <a:gd name="adj" fmla="val 7692"/>
+              <a:gd name="adj" fmla="val 9524"/>
             </a:avLst>
           </a:prstGeom>
           <a:solidFill>
@@ -10664,14 +10703,14 @@
       </p:sp>
       <p:sp>
         <p:nvSpPr>
-          <p:cNvPr id="40" name="Text 38"/>
+          <p:cNvPr id="41" name="Text 39"/>
           <p:cNvSpPr/>
           <p:nvPr/>
         </p:nvSpPr>
         <p:spPr>
           <a:xfrm>
             <a:off x="4850892" y="4169664"/>
-            <a:ext cx="685800" cy="475488"/>
+            <a:ext cx="685800" cy="384048"/>
           </a:xfrm>
           <a:prstGeom prst="rect">
             <a:avLst/>
@@ -10695,7 +10734,7 @@
                 <a:ea typeface="Trebuchet MS" pitchFamily="34" charset="-122"/>
                 <a:cs typeface="Trebuchet MS" pitchFamily="34" charset="-120"/>
               </a:rPr>
-              <a:t>k</a:t>
+              <a:t>e</a:t>
             </a:r>
             <a:endParaRPr lang="en-US" sz="900" dirty="0"/>
           </a:p>
@@ -10703,18 +10742,57 @@
       </p:sp>
       <p:sp>
         <p:nvSpPr>
-          <p:cNvPr id="41" name="Shape 39"/>
+          <p:cNvPr id="42" name="Text 40"/>
+          <p:cNvSpPr/>
+          <p:nvPr/>
+        </p:nvSpPr>
+        <p:spPr>
+          <a:xfrm>
+            <a:off x="4850892" y="4572000"/>
+            <a:ext cx="685800" cy="219456"/>
+          </a:xfrm>
+          <a:prstGeom prst="rect">
+            <a:avLst/>
+          </a:prstGeom>
+          <a:noFill/>
+          <a:ln/>
+        </p:spPr>
+        <p:txBody>
+          <a:bodyPr wrap="square" lIns="0" tIns="0" rIns="0" bIns="0" rtlCol="0" anchor="t"/>
+          <a:lstStyle/>
+          <a:p>
+            <a:pPr algn="ctr" indent="0" marL="0">
+              <a:buNone/>
+            </a:pPr>
+            <a:r>
+              <a:rPr lang="en-US" sz="750" i="1" dirty="0">
+                <a:solidFill>
+                  <a:srgbClr val="94A3B8"/>
+                </a:solidFill>
+                <a:latin typeface="Calibri" pitchFamily="34" charset="0"/>
+                <a:ea typeface="Calibri" pitchFamily="34" charset="-122"/>
+                <a:cs typeface="Calibri" pitchFamily="34" charset="-120"/>
+              </a:rPr>
+              <a:t>silent</a:t>
+            </a:r>
+            <a:endParaRPr lang="en-US" sz="750" dirty="0"/>
+          </a:p>
+        </p:txBody>
+      </p:sp>
+      <p:sp>
+        <p:nvSpPr>
+          <p:cNvPr id="43" name="Shape 41"/>
           <p:cNvSpPr/>
           <p:nvPr/>
         </p:nvSpPr>
         <p:spPr>
           <a:xfrm>
             <a:off x="5759577" y="4169664"/>
-            <a:ext cx="685800" cy="475488"/>
+            <a:ext cx="685800" cy="384048"/>
           </a:xfrm>
           <a:prstGeom prst="rect">
             <a:avLst>
-              <a:gd name="adj" fmla="val 7692"/>
+              <a:gd name="adj" fmla="val 9524"/>
             </a:avLst>
           </a:prstGeom>
           <a:solidFill>
@@ -10730,14 +10808,14 @@
       </p:sp>
       <p:sp>
         <p:nvSpPr>
-          <p:cNvPr id="42" name="Text 40"/>
+          <p:cNvPr id="44" name="Text 42"/>
           <p:cNvSpPr/>
           <p:nvPr/>
         </p:nvSpPr>
         <p:spPr>
           <a:xfrm>
             <a:off x="5759577" y="4169664"/>
-            <a:ext cx="685800" cy="475488"/>
+            <a:ext cx="685800" cy="384048"/>
           </a:xfrm>
           <a:prstGeom prst="rect">
             <a:avLst/>
@@ -10769,18 +10847,18 @@
       </p:sp>
       <p:sp>
         <p:nvSpPr>
-          <p:cNvPr id="43" name="Shape 41"/>
+          <p:cNvPr id="45" name="Shape 43"/>
           <p:cNvSpPr/>
           <p:nvPr/>
         </p:nvSpPr>
         <p:spPr>
           <a:xfrm>
             <a:off x="6668262" y="4169664"/>
-            <a:ext cx="685800" cy="475488"/>
+            <a:ext cx="685800" cy="384048"/>
           </a:xfrm>
           <a:prstGeom prst="rect">
             <a:avLst>
-              <a:gd name="adj" fmla="val 7692"/>
+              <a:gd name="adj" fmla="val 9524"/>
             </a:avLst>
           </a:prstGeom>
           <a:solidFill>
@@ -10796,14 +10874,14 @@
       </p:sp>
       <p:sp>
         <p:nvSpPr>
-          <p:cNvPr id="44" name="Text 42"/>
+          <p:cNvPr id="46" name="Text 44"/>
           <p:cNvSpPr/>
           <p:nvPr/>
         </p:nvSpPr>
         <p:spPr>
           <a:xfrm>
             <a:off x="6668262" y="4169664"/>
-            <a:ext cx="685800" cy="475488"/>
+            <a:ext cx="685800" cy="384048"/>
           </a:xfrm>
           <a:prstGeom prst="rect">
             <a:avLst/>
@@ -10835,18 +10913,18 @@
       </p:sp>
       <p:sp>
         <p:nvSpPr>
-          <p:cNvPr id="45" name="Shape 43"/>
+          <p:cNvPr id="47" name="Shape 45"/>
           <p:cNvSpPr/>
           <p:nvPr/>
         </p:nvSpPr>
         <p:spPr>
           <a:xfrm>
             <a:off x="7576947" y="4169664"/>
-            <a:ext cx="685800" cy="475488"/>
+            <a:ext cx="685800" cy="384048"/>
           </a:xfrm>
           <a:prstGeom prst="rect">
             <a:avLst>
-              <a:gd name="adj" fmla="val 7692"/>
+              <a:gd name="adj" fmla="val 9524"/>
             </a:avLst>
           </a:prstGeom>
           <a:solidFill>
@@ -10862,14 +10940,14 @@
       </p:sp>
       <p:sp>
         <p:nvSpPr>
-          <p:cNvPr id="46" name="Text 44"/>
+          <p:cNvPr id="48" name="Text 46"/>
           <p:cNvSpPr/>
           <p:nvPr/>
         </p:nvSpPr>
         <p:spPr>
           <a:xfrm>
             <a:off x="7576947" y="4169664"/>
-            <a:ext cx="685800" cy="475488"/>
+            <a:ext cx="685800" cy="384048"/>
           </a:xfrm>
           <a:prstGeom prst="rect">
             <a:avLst/>
@@ -11324,7 +11402,7 @@
                 <a:ea typeface="Trebuchet MS" pitchFamily="34" charset="-122"/>
                 <a:cs typeface="Trebuchet MS" pitchFamily="34" charset="-120"/>
               </a:rPr>
-              <a:t>wonderful</a:t>
+              <a:t>grateful</a:t>
             </a:r>
             <a:endParaRPr lang="en-US" sz="2800" dirty="0"/>
           </a:p>
@@ -12151,7 +12229,7 @@
                 <a:ea typeface="Trebuchet MS" pitchFamily="34" charset="-122"/>
                 <a:cs typeface="Trebuchet MS" pitchFamily="34" charset="-120"/>
               </a:rPr>
-              <a:t>wonderful</a:t>
+              <a:t>grateful</a:t>
             </a:r>
             <a:endParaRPr lang="en-US" sz="2800" dirty="0"/>
           </a:p>
@@ -12290,7 +12368,7 @@
                 <a:ea typeface="Trebuchet MS" pitchFamily="34" charset="-122"/>
                 <a:cs typeface="Trebuchet MS" pitchFamily="34" charset="-120"/>
               </a:rPr>
-              <a:t>wonder</a:t>
+              <a:t>grate</a:t>
             </a:r>
             <a:endParaRPr lang="en-US" sz="1300" dirty="0"/>
           </a:p>
@@ -12329,7 +12407,7 @@
                 <a:ea typeface="Calibri" pitchFamily="34" charset="-122"/>
                 <a:cs typeface="Calibri" pitchFamily="34" charset="-120"/>
               </a:rPr>
-              <a:t>amazement or awe</a:t>
+              <a:t>pleasing, welcome</a:t>
             </a:r>
             <a:endParaRPr lang="en-US" sz="850" dirty="0"/>
           </a:p>
@@ -12441,7 +12519,7 @@
                 <a:ea typeface="Calibri" pitchFamily="34" charset="-122"/>
                 <a:cs typeface="Calibri" pitchFamily="34" charset="-120"/>
               </a:rPr>
-              <a:t>full of</a:t>
+              <a:t>full of, having quality</a:t>
             </a:r>
             <a:endParaRPr lang="en-US" sz="850" dirty="0"/>
           </a:p>
@@ -13136,7 +13214,7 @@
                 <a:ea typeface="Trebuchet MS" pitchFamily="34" charset="-122"/>
                 <a:cs typeface="Trebuchet MS" pitchFamily="34" charset="-120"/>
               </a:rPr>
-              <a:t>wonderful</a:t>
+              <a:t>grateful</a:t>
             </a:r>
             <a:endParaRPr lang="en-US" sz="2800" dirty="0"/>
           </a:p>
@@ -13275,7 +13353,7 @@
                 <a:ea typeface="Trebuchet MS" pitchFamily="34" charset="-122"/>
                 <a:cs typeface="Trebuchet MS" pitchFamily="34" charset="-120"/>
               </a:rPr>
-              <a:t>wonder</a:t>
+              <a:t>grate</a:t>
             </a:r>
             <a:endParaRPr lang="en-US" sz="1300" dirty="0"/>
           </a:p>
@@ -13314,7 +13392,7 @@
                 <a:ea typeface="Calibri" pitchFamily="34" charset="-122"/>
                 <a:cs typeface="Calibri" pitchFamily="34" charset="-120"/>
               </a:rPr>
-              <a:t>amazement or awe</a:t>
+              <a:t>pleasing, welcome</a:t>
             </a:r>
             <a:endParaRPr lang="en-US" sz="850" dirty="0"/>
           </a:p>
@@ -13426,7 +13504,7 @@
                 <a:ea typeface="Calibri" pitchFamily="34" charset="-122"/>
                 <a:cs typeface="Calibri" pitchFamily="34" charset="-120"/>
               </a:rPr>
-              <a:t>full of</a:t>
+              <a:t>full of, having quality</a:t>
             </a:r>
             <a:endParaRPr lang="en-US" sz="850" dirty="0"/>
           </a:p>
@@ -13533,7 +13611,7 @@
         </p:nvSpPr>
         <p:spPr>
           <a:xfrm>
-            <a:off x="2313432" y="3364992"/>
+            <a:off x="2999232" y="3364992"/>
             <a:ext cx="1645920" cy="475488"/>
           </a:xfrm>
           <a:prstGeom prst="rect">
@@ -13560,7 +13638,7 @@
         </p:nvSpPr>
         <p:spPr>
           <a:xfrm>
-            <a:off x="2313432" y="3364992"/>
+            <a:off x="2999232" y="3364992"/>
             <a:ext cx="1645920" cy="475488"/>
           </a:xfrm>
           <a:prstGeom prst="rect">
@@ -13585,7 +13663,7 @@
                 <a:ea typeface="Trebuchet MS" pitchFamily="34" charset="-122"/>
                 <a:cs typeface="Trebuchet MS" pitchFamily="34" charset="-120"/>
               </a:rPr>
-              <a:t>won</a:t>
+              <a:t>grate</a:t>
             </a:r>
             <a:endParaRPr lang="en-US" sz="1400" dirty="0"/>
           </a:p>
@@ -13599,8 +13677,8 @@
         </p:nvSpPr>
         <p:spPr>
           <a:xfrm>
-            <a:off x="3959352" y="3364992"/>
-            <a:ext cx="411480" cy="475488"/>
+            <a:off x="4645152" y="3364992"/>
+            <a:ext cx="1097280" cy="475488"/>
           </a:xfrm>
           <a:prstGeom prst="rect">
             <a:avLst/>
@@ -13638,7 +13716,7 @@
         </p:nvSpPr>
         <p:spPr>
           <a:xfrm>
-            <a:off x="4370832" y="3364992"/>
+            <a:off x="5742432" y="3364992"/>
             <a:ext cx="1645920" cy="475488"/>
           </a:xfrm>
           <a:prstGeom prst="rect">
@@ -13665,7 +13743,7 @@
         </p:nvSpPr>
         <p:spPr>
           <a:xfrm>
-            <a:off x="4370832" y="3364992"/>
+            <a:off x="5742432" y="3364992"/>
             <a:ext cx="1645920" cy="475488"/>
           </a:xfrm>
           <a:prstGeom prst="rect">
@@ -13690,7 +13768,7 @@
                 <a:ea typeface="Trebuchet MS" pitchFamily="34" charset="-122"/>
                 <a:cs typeface="Trebuchet MS" pitchFamily="34" charset="-120"/>
               </a:rPr>
-              <a:t>der</a:t>
+              <a:t>ful</a:t>
             </a:r>
             <a:endParaRPr lang="en-US" sz="1400" dirty="0"/>
           </a:p>
@@ -13698,14 +13776,41 @@
       </p:sp>
       <p:sp>
         <p:nvSpPr>
-          <p:cNvPr id="30" name="Text 28"/>
-          <p:cNvSpPr/>
-          <p:nvPr/>
-        </p:nvSpPr>
-        <p:spPr>
-          <a:xfrm>
-            <a:off x="6016752" y="3364992"/>
-            <a:ext cx="411480" cy="475488"/>
+          <p:cNvPr id="30" name="Shape 28"/>
+          <p:cNvSpPr/>
+          <p:nvPr/>
+        </p:nvSpPr>
+        <p:spPr>
+          <a:xfrm>
+            <a:off x="365760" y="4096512"/>
+            <a:ext cx="1371600" cy="804672"/>
+          </a:xfrm>
+          <a:prstGeom prst="rect">
+            <a:avLst>
+              <a:gd name="adj" fmla="val 6818"/>
+            </a:avLst>
+          </a:prstGeom>
+          <a:solidFill>
+            <a:srgbClr val="E2E8F0"/>
+          </a:solidFill>
+          <a:ln w="12700">
+            <a:solidFill>
+              <a:srgbClr val="E2E8F0"/>
+            </a:solidFill>
+            <a:prstDash val="solid"/>
+          </a:ln>
+        </p:spPr>
+      </p:sp>
+      <p:sp>
+        <p:nvSpPr>
+          <p:cNvPr id="31" name="Text 29"/>
+          <p:cNvSpPr/>
+          <p:nvPr/>
+        </p:nvSpPr>
+        <p:spPr>
+          <a:xfrm>
+            <a:off x="365760" y="4096512"/>
+            <a:ext cx="1371600" cy="804672"/>
           </a:xfrm>
           <a:prstGeom prst="rect">
             <a:avLst/>
@@ -13721,96 +13826,30 @@
               <a:buNone/>
             </a:pPr>
             <a:r>
-              <a:rPr lang="en-US" sz="1600" b="1" dirty="0">
-                <a:solidFill>
-                  <a:srgbClr val="0D9488"/>
+              <a:rPr lang="en-US" sz="1100" b="1" dirty="0">
+                <a:solidFill>
+                  <a:srgbClr val="475569"/>
                 </a:solidFill>
                 <a:latin typeface="Trebuchet MS" pitchFamily="34" charset="0"/>
                 <a:ea typeface="Trebuchet MS" pitchFamily="34" charset="-122"/>
                 <a:cs typeface="Trebuchet MS" pitchFamily="34" charset="-120"/>
               </a:rPr>
-              <a:t>·</a:t>
-            </a:r>
-            <a:endParaRPr lang="en-US" sz="1600" dirty="0"/>
-          </a:p>
-        </p:txBody>
-      </p:sp>
-      <p:sp>
-        <p:nvSpPr>
-          <p:cNvPr id="31" name="Shape 29"/>
-          <p:cNvSpPr/>
-          <p:nvPr/>
-        </p:nvSpPr>
-        <p:spPr>
-          <a:xfrm>
-            <a:off x="6428232" y="3364992"/>
-            <a:ext cx="1645920" cy="475488"/>
-          </a:xfrm>
-          <a:prstGeom prst="rect">
-            <a:avLst>
-              <a:gd name="adj" fmla="val 9615"/>
-            </a:avLst>
-          </a:prstGeom>
-          <a:solidFill>
-            <a:srgbClr val="FFFFFF"/>
-          </a:solidFill>
-          <a:ln w="12700">
-            <a:solidFill>
-              <a:srgbClr val="0D9488"/>
-            </a:solidFill>
-            <a:prstDash val="solid"/>
-          </a:ln>
-        </p:spPr>
-      </p:sp>
-      <p:sp>
-        <p:nvSpPr>
-          <p:cNvPr id="32" name="Text 30"/>
-          <p:cNvSpPr/>
-          <p:nvPr/>
-        </p:nvSpPr>
-        <p:spPr>
-          <a:xfrm>
-            <a:off x="6428232" y="3364992"/>
-            <a:ext cx="1645920" cy="475488"/>
-          </a:xfrm>
-          <a:prstGeom prst="rect">
-            <a:avLst/>
-          </a:prstGeom>
-          <a:noFill/>
-          <a:ln/>
-        </p:spPr>
-        <p:txBody>
-          <a:bodyPr wrap="square" lIns="0" tIns="0" rIns="0" bIns="0" rtlCol="0" anchor="ctr"/>
-          <a:lstStyle/>
-          <a:p>
-            <a:pPr algn="ctr" indent="0" marL="0">
-              <a:buNone/>
-            </a:pPr>
-            <a:r>
-              <a:rPr lang="en-US" sz="1400" b="1" dirty="0">
-                <a:solidFill>
-                  <a:srgbClr val="0D9488"/>
-                </a:solidFill>
-                <a:latin typeface="Trebuchet MS" pitchFamily="34" charset="0"/>
-                <a:ea typeface="Trebuchet MS" pitchFamily="34" charset="-122"/>
-                <a:cs typeface="Trebuchet MS" pitchFamily="34" charset="-120"/>
-              </a:rPr>
-              <a:t>ful</a:t>
-            </a:r>
-            <a:endParaRPr lang="en-US" sz="1400" dirty="0"/>
-          </a:p>
-        </p:txBody>
-      </p:sp>
-      <p:sp>
-        <p:nvSpPr>
-          <p:cNvPr id="33" name="Shape 31"/>
-          <p:cNvSpPr/>
-          <p:nvPr/>
-        </p:nvSpPr>
-        <p:spPr>
-          <a:xfrm>
-            <a:off x="365760" y="4096512"/>
-            <a:ext cx="1371600" cy="804672"/>
+              <a:t>Phonemes</a:t>
+            </a:r>
+            <a:endParaRPr lang="en-US" sz="1100" dirty="0"/>
+          </a:p>
+        </p:txBody>
+      </p:sp>
+      <p:sp>
+        <p:nvSpPr>
+          <p:cNvPr id="32" name="Shape 30"/>
+          <p:cNvSpPr/>
+          <p:nvPr/>
+        </p:nvSpPr>
+        <p:spPr>
+          <a:xfrm>
+            <a:off x="1874520" y="4096512"/>
+            <a:ext cx="6903720" cy="804672"/>
           </a:xfrm>
           <a:prstGeom prst="rect">
             <a:avLst>
@@ -13818,85 +13857,19 @@
             </a:avLst>
           </a:prstGeom>
           <a:solidFill>
-            <a:srgbClr val="E2E8F0"/>
+            <a:srgbClr val="F8FAFC"/>
           </a:solidFill>
           <a:ln w="12700">
             <a:solidFill>
               <a:srgbClr val="E2E8F0"/>
             </a:solidFill>
-            <a:prstDash val="solid"/>
-          </a:ln>
-        </p:spPr>
-      </p:sp>
-      <p:sp>
-        <p:nvSpPr>
-          <p:cNvPr id="34" name="Text 32"/>
-          <p:cNvSpPr/>
-          <p:nvPr/>
-        </p:nvSpPr>
-        <p:spPr>
-          <a:xfrm>
-            <a:off x="365760" y="4096512"/>
-            <a:ext cx="1371600" cy="804672"/>
-          </a:xfrm>
-          <a:prstGeom prst="rect">
-            <a:avLst/>
-          </a:prstGeom>
-          <a:noFill/>
-          <a:ln/>
-        </p:spPr>
-        <p:txBody>
-          <a:bodyPr wrap="square" lIns="0" tIns="0" rIns="0" bIns="0" rtlCol="0" anchor="ctr"/>
-          <a:lstStyle/>
-          <a:p>
-            <a:pPr algn="ctr" indent="0" marL="0">
-              <a:buNone/>
-            </a:pPr>
-            <a:r>
-              <a:rPr lang="en-US" sz="1100" b="1" dirty="0">
-                <a:solidFill>
-                  <a:srgbClr val="475569"/>
-                </a:solidFill>
-                <a:latin typeface="Trebuchet MS" pitchFamily="34" charset="0"/>
-                <a:ea typeface="Trebuchet MS" pitchFamily="34" charset="-122"/>
-                <a:cs typeface="Trebuchet MS" pitchFamily="34" charset="-120"/>
-              </a:rPr>
-              <a:t>Phonemes</a:t>
-            </a:r>
-            <a:endParaRPr lang="en-US" sz="1100" dirty="0"/>
-          </a:p>
-        </p:txBody>
-      </p:sp>
-      <p:sp>
-        <p:nvSpPr>
-          <p:cNvPr id="35" name="Shape 33"/>
-          <p:cNvSpPr/>
-          <p:nvPr/>
-        </p:nvSpPr>
-        <p:spPr>
-          <a:xfrm>
-            <a:off x="1874520" y="4096512"/>
-            <a:ext cx="6903720" cy="804672"/>
-          </a:xfrm>
-          <a:prstGeom prst="rect">
-            <a:avLst>
-              <a:gd name="adj" fmla="val 6818"/>
-            </a:avLst>
-          </a:prstGeom>
-          <a:solidFill>
-            <a:srgbClr val="F8FAFC"/>
-          </a:solidFill>
-          <a:ln w="12700">
-            <a:solidFill>
-              <a:srgbClr val="E2E8F0"/>
-            </a:solidFill>
             <a:prstDash val="dash"/>
           </a:ln>
         </p:spPr>
       </p:sp>
       <p:sp>
         <p:nvSpPr>
-          <p:cNvPr id="36" name="Text 34"/>
+          <p:cNvPr id="33" name="Text 31"/>
           <p:cNvSpPr/>
           <p:nvPr/>
         </p:nvSpPr>
@@ -14623,7 +14596,7 @@
                 <a:ea typeface="Trebuchet MS" pitchFamily="34" charset="-122"/>
                 <a:cs typeface="Trebuchet MS" pitchFamily="34" charset="-120"/>
               </a:rPr>
-              <a:t>wonderful</a:t>
+              <a:t>grateful</a:t>
             </a:r>
             <a:endParaRPr lang="en-US" sz="2800" dirty="0"/>
           </a:p>
@@ -14762,7 +14735,7 @@
                 <a:ea typeface="Trebuchet MS" pitchFamily="34" charset="-122"/>
                 <a:cs typeface="Trebuchet MS" pitchFamily="34" charset="-120"/>
               </a:rPr>
-              <a:t>wonder</a:t>
+              <a:t>grate</a:t>
             </a:r>
             <a:endParaRPr lang="en-US" sz="1300" dirty="0"/>
           </a:p>
@@ -14801,7 +14774,7 @@
                 <a:ea typeface="Calibri" pitchFamily="34" charset="-122"/>
                 <a:cs typeface="Calibri" pitchFamily="34" charset="-120"/>
               </a:rPr>
-              <a:t>amazement or awe</a:t>
+              <a:t>pleasing, welcome</a:t>
             </a:r>
             <a:endParaRPr lang="en-US" sz="850" dirty="0"/>
           </a:p>
@@ -14913,7 +14886,7 @@
                 <a:ea typeface="Calibri" pitchFamily="34" charset="-122"/>
                 <a:cs typeface="Calibri" pitchFamily="34" charset="-120"/>
               </a:rPr>
-              <a:t>full of</a:t>
+              <a:t>full of, having quality</a:t>
             </a:r>
             <a:endParaRPr lang="en-US" sz="850" dirty="0"/>
           </a:p>
@@ -15020,7 +14993,7 @@
         </p:nvSpPr>
         <p:spPr>
           <a:xfrm>
-            <a:off x="2313432" y="3364992"/>
+            <a:off x="2999232" y="3364992"/>
             <a:ext cx="1645920" cy="475488"/>
           </a:xfrm>
           <a:prstGeom prst="rect">
@@ -15047,7 +15020,7 @@
         </p:nvSpPr>
         <p:spPr>
           <a:xfrm>
-            <a:off x="2313432" y="3364992"/>
+            <a:off x="2999232" y="3364992"/>
             <a:ext cx="1645920" cy="475488"/>
           </a:xfrm>
           <a:prstGeom prst="rect">
@@ -15072,7 +15045,7 @@
                 <a:ea typeface="Trebuchet MS" pitchFamily="34" charset="-122"/>
                 <a:cs typeface="Trebuchet MS" pitchFamily="34" charset="-120"/>
               </a:rPr>
-              <a:t>won</a:t>
+              <a:t>grate</a:t>
             </a:r>
             <a:endParaRPr lang="en-US" sz="1400" dirty="0"/>
           </a:p>
@@ -15086,8 +15059,8 @@
         </p:nvSpPr>
         <p:spPr>
           <a:xfrm>
-            <a:off x="3959352" y="3364992"/>
-            <a:ext cx="411480" cy="475488"/>
+            <a:off x="4645152" y="3364992"/>
+            <a:ext cx="1097280" cy="475488"/>
           </a:xfrm>
           <a:prstGeom prst="rect">
             <a:avLst/>
@@ -15125,7 +15098,7 @@
         </p:nvSpPr>
         <p:spPr>
           <a:xfrm>
-            <a:off x="4370832" y="3364992"/>
+            <a:off x="5742432" y="3364992"/>
             <a:ext cx="1645920" cy="475488"/>
           </a:xfrm>
           <a:prstGeom prst="rect">
@@ -15152,7 +15125,7 @@
         </p:nvSpPr>
         <p:spPr>
           <a:xfrm>
-            <a:off x="4370832" y="3364992"/>
+            <a:off x="5742432" y="3364992"/>
             <a:ext cx="1645920" cy="475488"/>
           </a:xfrm>
           <a:prstGeom prst="rect">
@@ -15177,7 +15150,7 @@
                 <a:ea typeface="Trebuchet MS" pitchFamily="34" charset="-122"/>
                 <a:cs typeface="Trebuchet MS" pitchFamily="34" charset="-120"/>
               </a:rPr>
-              <a:t>der</a:t>
+              <a:t>ful</a:t>
             </a:r>
             <a:endParaRPr lang="en-US" sz="1400" dirty="0"/>
           </a:p>
@@ -15185,14 +15158,41 @@
       </p:sp>
       <p:sp>
         <p:nvSpPr>
-          <p:cNvPr id="30" name="Text 28"/>
-          <p:cNvSpPr/>
-          <p:nvPr/>
-        </p:nvSpPr>
-        <p:spPr>
-          <a:xfrm>
-            <a:off x="6016752" y="3364992"/>
-            <a:ext cx="411480" cy="475488"/>
+          <p:cNvPr id="30" name="Shape 28"/>
+          <p:cNvSpPr/>
+          <p:nvPr/>
+        </p:nvSpPr>
+        <p:spPr>
+          <a:xfrm>
+            <a:off x="365760" y="4096512"/>
+            <a:ext cx="1371600" cy="804672"/>
+          </a:xfrm>
+          <a:prstGeom prst="rect">
+            <a:avLst>
+              <a:gd name="adj" fmla="val 6818"/>
+            </a:avLst>
+          </a:prstGeom>
+          <a:solidFill>
+            <a:srgbClr val="E2E8F0"/>
+          </a:solidFill>
+          <a:ln w="12700">
+            <a:solidFill>
+              <a:srgbClr val="E2E8F0"/>
+            </a:solidFill>
+            <a:prstDash val="solid"/>
+          </a:ln>
+        </p:spPr>
+      </p:sp>
+      <p:sp>
+        <p:nvSpPr>
+          <p:cNvPr id="31" name="Text 29"/>
+          <p:cNvSpPr/>
+          <p:nvPr/>
+        </p:nvSpPr>
+        <p:spPr>
+          <a:xfrm>
+            <a:off x="365760" y="4096512"/>
+            <a:ext cx="1371600" cy="804672"/>
           </a:xfrm>
           <a:prstGeom prst="rect">
             <a:avLst/>
@@ -15208,57 +15208,84 @@
               <a:buNone/>
             </a:pPr>
             <a:r>
-              <a:rPr lang="en-US" sz="1600" b="1" dirty="0">
-                <a:solidFill>
-                  <a:srgbClr val="0D9488"/>
+              <a:rPr lang="en-US" sz="1100" b="1" dirty="0">
+                <a:solidFill>
+                  <a:srgbClr val="475569"/>
                 </a:solidFill>
                 <a:latin typeface="Trebuchet MS" pitchFamily="34" charset="0"/>
                 <a:ea typeface="Trebuchet MS" pitchFamily="34" charset="-122"/>
                 <a:cs typeface="Trebuchet MS" pitchFamily="34" charset="-120"/>
               </a:rPr>
-              <a:t>·</a:t>
-            </a:r>
-            <a:endParaRPr lang="en-US" sz="1600" dirty="0"/>
-          </a:p>
-        </p:txBody>
-      </p:sp>
-      <p:sp>
-        <p:nvSpPr>
-          <p:cNvPr id="31" name="Shape 29"/>
-          <p:cNvSpPr/>
-          <p:nvPr/>
-        </p:nvSpPr>
-        <p:spPr>
-          <a:xfrm>
-            <a:off x="6428232" y="3364992"/>
-            <a:ext cx="1645920" cy="475488"/>
+              <a:t>Phonemes</a:t>
+            </a:r>
+            <a:endParaRPr lang="en-US" sz="1100" dirty="0"/>
+          </a:p>
+        </p:txBody>
+      </p:sp>
+      <p:sp>
+        <p:nvSpPr>
+          <p:cNvPr id="32" name="Shape 30"/>
+          <p:cNvSpPr/>
+          <p:nvPr/>
+        </p:nvSpPr>
+        <p:spPr>
+          <a:xfrm>
+            <a:off x="1874520" y="4096512"/>
+            <a:ext cx="6903720" cy="804672"/>
           </a:xfrm>
           <a:prstGeom prst="rect">
             <a:avLst>
-              <a:gd name="adj" fmla="val 9615"/>
+              <a:gd name="adj" fmla="val 6818"/>
             </a:avLst>
           </a:prstGeom>
           <a:solidFill>
+            <a:srgbClr val="FCE7F3"/>
+          </a:solidFill>
+          <a:ln w="12700">
+            <a:solidFill>
+              <a:srgbClr val="DB2777"/>
+            </a:solidFill>
+            <a:prstDash val="solid"/>
+          </a:ln>
+        </p:spPr>
+      </p:sp>
+      <p:sp>
+        <p:nvSpPr>
+          <p:cNvPr id="33" name="Shape 31"/>
+          <p:cNvSpPr/>
+          <p:nvPr/>
+        </p:nvSpPr>
+        <p:spPr>
+          <a:xfrm>
+            <a:off x="2023872" y="4169664"/>
+            <a:ext cx="685800" cy="384048"/>
+          </a:xfrm>
+          <a:prstGeom prst="rect">
+            <a:avLst>
+              <a:gd name="adj" fmla="val 9524"/>
+            </a:avLst>
+          </a:prstGeom>
+          <a:solidFill>
             <a:srgbClr val="FFFFFF"/>
           </a:solidFill>
           <a:ln w="12700">
             <a:solidFill>
-              <a:srgbClr val="0D9488"/>
-            </a:solidFill>
-            <a:prstDash val="solid"/>
-          </a:ln>
-        </p:spPr>
-      </p:sp>
-      <p:sp>
-        <p:nvSpPr>
-          <p:cNvPr id="32" name="Text 30"/>
-          <p:cNvSpPr/>
-          <p:nvPr/>
-        </p:nvSpPr>
-        <p:spPr>
-          <a:xfrm>
-            <a:off x="6428232" y="3364992"/>
-            <a:ext cx="1645920" cy="475488"/>
+              <a:srgbClr val="DB2777"/>
+            </a:solidFill>
+            <a:prstDash val="solid"/>
+          </a:ln>
+        </p:spPr>
+      </p:sp>
+      <p:sp>
+        <p:nvSpPr>
+          <p:cNvPr id="34" name="Text 32"/>
+          <p:cNvSpPr/>
+          <p:nvPr/>
+        </p:nvSpPr>
+        <p:spPr>
+          <a:xfrm>
+            <a:off x="2023872" y="4169664"/>
+            <a:ext cx="685800" cy="384048"/>
           </a:xfrm>
           <a:prstGeom prst="rect">
             <a:avLst/>
@@ -15274,57 +15301,57 @@
               <a:buNone/>
             </a:pPr>
             <a:r>
-              <a:rPr lang="en-US" sz="1400" b="1" dirty="0">
-                <a:solidFill>
-                  <a:srgbClr val="0D9488"/>
+              <a:rPr lang="en-US" sz="900" b="1" dirty="0">
+                <a:solidFill>
+                  <a:srgbClr val="9D174D"/>
                 </a:solidFill>
                 <a:latin typeface="Trebuchet MS" pitchFamily="34" charset="0"/>
                 <a:ea typeface="Trebuchet MS" pitchFamily="34" charset="-122"/>
                 <a:cs typeface="Trebuchet MS" pitchFamily="34" charset="-120"/>
               </a:rPr>
-              <a:t>ful</a:t>
-            </a:r>
-            <a:endParaRPr lang="en-US" sz="1400" dirty="0"/>
-          </a:p>
-        </p:txBody>
-      </p:sp>
-      <p:sp>
-        <p:nvSpPr>
-          <p:cNvPr id="33" name="Shape 31"/>
-          <p:cNvSpPr/>
-          <p:nvPr/>
-        </p:nvSpPr>
-        <p:spPr>
-          <a:xfrm>
-            <a:off x="365760" y="4096512"/>
-            <a:ext cx="1371600" cy="804672"/>
+              <a:t>g</a:t>
+            </a:r>
+            <a:endParaRPr lang="en-US" sz="900" dirty="0"/>
+          </a:p>
+        </p:txBody>
+      </p:sp>
+      <p:sp>
+        <p:nvSpPr>
+          <p:cNvPr id="35" name="Shape 33"/>
+          <p:cNvSpPr/>
+          <p:nvPr/>
+        </p:nvSpPr>
+        <p:spPr>
+          <a:xfrm>
+            <a:off x="2831592" y="4169664"/>
+            <a:ext cx="685800" cy="384048"/>
           </a:xfrm>
           <a:prstGeom prst="rect">
             <a:avLst>
-              <a:gd name="adj" fmla="val 6818"/>
+              <a:gd name="adj" fmla="val 9524"/>
             </a:avLst>
           </a:prstGeom>
           <a:solidFill>
-            <a:srgbClr val="E2E8F0"/>
-          </a:solidFill>
-          <a:ln w="12700">
-            <a:solidFill>
-              <a:srgbClr val="E2E8F0"/>
-            </a:solidFill>
-            <a:prstDash val="solid"/>
-          </a:ln>
-        </p:spPr>
-      </p:sp>
-      <p:sp>
-        <p:nvSpPr>
-          <p:cNvPr id="34" name="Text 32"/>
-          <p:cNvSpPr/>
-          <p:nvPr/>
-        </p:nvSpPr>
-        <p:spPr>
-          <a:xfrm>
-            <a:off x="365760" y="4096512"/>
-            <a:ext cx="1371600" cy="804672"/>
+            <a:srgbClr val="FFFFFF"/>
+          </a:solidFill>
+          <a:ln w="12700">
+            <a:solidFill>
+              <a:srgbClr val="DB2777"/>
+            </a:solidFill>
+            <a:prstDash val="solid"/>
+          </a:ln>
+        </p:spPr>
+      </p:sp>
+      <p:sp>
+        <p:nvSpPr>
+          <p:cNvPr id="36" name="Text 34"/>
+          <p:cNvSpPr/>
+          <p:nvPr/>
+        </p:nvSpPr>
+        <p:spPr>
+          <a:xfrm>
+            <a:off x="2831592" y="4169664"/>
+            <a:ext cx="685800" cy="384048"/>
           </a:xfrm>
           <a:prstGeom prst="rect">
             <a:avLst/>
@@ -15340,38 +15367,38 @@
               <a:buNone/>
             </a:pPr>
             <a:r>
-              <a:rPr lang="en-US" sz="1100" b="1" dirty="0">
-                <a:solidFill>
-                  <a:srgbClr val="475569"/>
+              <a:rPr lang="en-US" sz="900" b="1" dirty="0">
+                <a:solidFill>
+                  <a:srgbClr val="9D174D"/>
                 </a:solidFill>
                 <a:latin typeface="Trebuchet MS" pitchFamily="34" charset="0"/>
                 <a:ea typeface="Trebuchet MS" pitchFamily="34" charset="-122"/>
                 <a:cs typeface="Trebuchet MS" pitchFamily="34" charset="-120"/>
               </a:rPr>
-              <a:t>Phonemes</a:t>
-            </a:r>
-            <a:endParaRPr lang="en-US" sz="1100" dirty="0"/>
-          </a:p>
-        </p:txBody>
-      </p:sp>
-      <p:sp>
-        <p:nvSpPr>
-          <p:cNvPr id="35" name="Shape 33"/>
-          <p:cNvSpPr/>
-          <p:nvPr/>
-        </p:nvSpPr>
-        <p:spPr>
-          <a:xfrm>
-            <a:off x="1874520" y="4096512"/>
-            <a:ext cx="6903720" cy="658368"/>
+              <a:t>r</a:t>
+            </a:r>
+            <a:endParaRPr lang="en-US" sz="900" dirty="0"/>
+          </a:p>
+        </p:txBody>
+      </p:sp>
+      <p:sp>
+        <p:nvSpPr>
+          <p:cNvPr id="37" name="Shape 35"/>
+          <p:cNvSpPr/>
+          <p:nvPr/>
+        </p:nvSpPr>
+        <p:spPr>
+          <a:xfrm>
+            <a:off x="3639312" y="4169664"/>
+            <a:ext cx="685800" cy="384048"/>
           </a:xfrm>
           <a:prstGeom prst="rect">
             <a:avLst>
-              <a:gd name="adj" fmla="val 8333"/>
+              <a:gd name="adj" fmla="val 9524"/>
             </a:avLst>
           </a:prstGeom>
           <a:solidFill>
-            <a:srgbClr val="FCE7F3"/>
+            <a:srgbClr val="FFFFFF"/>
           </a:solidFill>
           <a:ln w="12700">
             <a:solidFill>
@@ -15383,41 +15410,14 @@
       </p:sp>
       <p:sp>
         <p:nvSpPr>
-          <p:cNvPr id="36" name="Shape 34"/>
-          <p:cNvSpPr/>
-          <p:nvPr/>
-        </p:nvSpPr>
-        <p:spPr>
-          <a:xfrm>
-            <a:off x="2023872" y="4169664"/>
-            <a:ext cx="685800" cy="475488"/>
-          </a:xfrm>
-          <a:prstGeom prst="rect">
-            <a:avLst>
-              <a:gd name="adj" fmla="val 7692"/>
-            </a:avLst>
-          </a:prstGeom>
-          <a:solidFill>
-            <a:srgbClr val="FFFFFF"/>
-          </a:solidFill>
-          <a:ln w="12700">
-            <a:solidFill>
-              <a:srgbClr val="DB2777"/>
-            </a:solidFill>
-            <a:prstDash val="solid"/>
-          </a:ln>
-        </p:spPr>
-      </p:sp>
-      <p:sp>
-        <p:nvSpPr>
-          <p:cNvPr id="37" name="Text 35"/>
-          <p:cNvSpPr/>
-          <p:nvPr/>
-        </p:nvSpPr>
-        <p:spPr>
-          <a:xfrm>
-            <a:off x="2023872" y="4169664"/>
-            <a:ext cx="685800" cy="475488"/>
+          <p:cNvPr id="38" name="Text 36"/>
+          <p:cNvSpPr/>
+          <p:nvPr/>
+        </p:nvSpPr>
+        <p:spPr>
+          <a:xfrm>
+            <a:off x="3639312" y="4169664"/>
+            <a:ext cx="685800" cy="384048"/>
           </a:xfrm>
           <a:prstGeom prst="rect">
             <a:avLst/>
@@ -15441,7 +15441,7 @@
                 <a:ea typeface="Trebuchet MS" pitchFamily="34" charset="-122"/>
                 <a:cs typeface="Trebuchet MS" pitchFamily="34" charset="-120"/>
               </a:rPr>
-              <a:t>w</a:t>
+              <a:t>a</a:t>
             </a:r>
             <a:endParaRPr lang="en-US" sz="900" dirty="0"/>
           </a:p>
@@ -15449,18 +15449,57 @@
       </p:sp>
       <p:sp>
         <p:nvSpPr>
-          <p:cNvPr id="38" name="Shape 36"/>
-          <p:cNvSpPr/>
-          <p:nvPr/>
-        </p:nvSpPr>
-        <p:spPr>
-          <a:xfrm>
-            <a:off x="2831592" y="4169664"/>
-            <a:ext cx="685800" cy="475488"/>
+          <p:cNvPr id="39" name="Text 37"/>
+          <p:cNvSpPr/>
+          <p:nvPr/>
+        </p:nvSpPr>
+        <p:spPr>
+          <a:xfrm>
+            <a:off x="3639312" y="4572000"/>
+            <a:ext cx="685800" cy="219456"/>
+          </a:xfrm>
+          <a:prstGeom prst="rect">
+            <a:avLst/>
+          </a:prstGeom>
+          <a:noFill/>
+          <a:ln/>
+        </p:spPr>
+        <p:txBody>
+          <a:bodyPr wrap="square" lIns="0" tIns="0" rIns="0" bIns="0" rtlCol="0" anchor="t"/>
+          <a:lstStyle/>
+          <a:p>
+            <a:pPr algn="ctr" indent="0" marL="0">
+              <a:buNone/>
+            </a:pPr>
+            <a:r>
+              <a:rPr lang="en-US" sz="750" i="1" dirty="0">
+                <a:solidFill>
+                  <a:srgbClr val="94A3B8"/>
+                </a:solidFill>
+                <a:latin typeface="Calibri" pitchFamily="34" charset="0"/>
+                <a:ea typeface="Calibri" pitchFamily="34" charset="-122"/>
+                <a:cs typeface="Calibri" pitchFamily="34" charset="-120"/>
+              </a:rPr>
+              <a:t>/ay/</a:t>
+            </a:r>
+            <a:endParaRPr lang="en-US" sz="750" dirty="0"/>
+          </a:p>
+        </p:txBody>
+      </p:sp>
+      <p:sp>
+        <p:nvSpPr>
+          <p:cNvPr id="40" name="Shape 38"/>
+          <p:cNvSpPr/>
+          <p:nvPr/>
+        </p:nvSpPr>
+        <p:spPr>
+          <a:xfrm>
+            <a:off x="4447032" y="4169664"/>
+            <a:ext cx="685800" cy="384048"/>
           </a:xfrm>
           <a:prstGeom prst="rect">
             <a:avLst>
-              <a:gd name="adj" fmla="val 7692"/>
+              <a:gd name="adj" fmla="val 9524"/>
             </a:avLst>
           </a:prstGeom>
           <a:solidFill>
@@ -15476,14 +15515,14 @@
       </p:sp>
       <p:sp>
         <p:nvSpPr>
-          <p:cNvPr id="39" name="Text 37"/>
-          <p:cNvSpPr/>
-          <p:nvPr/>
-        </p:nvSpPr>
-        <p:spPr>
-          <a:xfrm>
-            <a:off x="2831592" y="4169664"/>
-            <a:ext cx="685800" cy="475488"/>
+          <p:cNvPr id="41" name="Text 39"/>
+          <p:cNvSpPr/>
+          <p:nvPr/>
+        </p:nvSpPr>
+        <p:spPr>
+          <a:xfrm>
+            <a:off x="4447032" y="4169664"/>
+            <a:ext cx="685800" cy="384048"/>
           </a:xfrm>
           <a:prstGeom prst="rect">
             <a:avLst/>
@@ -15507,7 +15546,7 @@
                 <a:ea typeface="Trebuchet MS" pitchFamily="34" charset="-122"/>
                 <a:cs typeface="Trebuchet MS" pitchFamily="34" charset="-120"/>
               </a:rPr>
-              <a:t>o</a:t>
+              <a:t>t</a:t>
             </a:r>
             <a:endParaRPr lang="en-US" sz="900" dirty="0"/>
           </a:p>
@@ -15515,18 +15554,18 @@
       </p:sp>
       <p:sp>
         <p:nvSpPr>
-          <p:cNvPr id="40" name="Shape 38"/>
-          <p:cNvSpPr/>
-          <p:nvPr/>
-        </p:nvSpPr>
-        <p:spPr>
-          <a:xfrm>
-            <a:off x="3639312" y="4169664"/>
-            <a:ext cx="685800" cy="475488"/>
+          <p:cNvPr id="42" name="Shape 40"/>
+          <p:cNvSpPr/>
+          <p:nvPr/>
+        </p:nvSpPr>
+        <p:spPr>
+          <a:xfrm>
+            <a:off x="5254752" y="4169664"/>
+            <a:ext cx="685800" cy="384048"/>
           </a:xfrm>
           <a:prstGeom prst="rect">
             <a:avLst>
-              <a:gd name="adj" fmla="val 7692"/>
+              <a:gd name="adj" fmla="val 9524"/>
             </a:avLst>
           </a:prstGeom>
           <a:solidFill>
@@ -15542,14 +15581,14 @@
       </p:sp>
       <p:sp>
         <p:nvSpPr>
-          <p:cNvPr id="41" name="Text 39"/>
-          <p:cNvSpPr/>
-          <p:nvPr/>
-        </p:nvSpPr>
-        <p:spPr>
-          <a:xfrm>
-            <a:off x="3639312" y="4169664"/>
-            <a:ext cx="685800" cy="475488"/>
+          <p:cNvPr id="43" name="Text 41"/>
+          <p:cNvSpPr/>
+          <p:nvPr/>
+        </p:nvSpPr>
+        <p:spPr>
+          <a:xfrm>
+            <a:off x="5254752" y="4169664"/>
+            <a:ext cx="685800" cy="384048"/>
           </a:xfrm>
           <a:prstGeom prst="rect">
             <a:avLst/>
@@ -15573,7 +15612,7 @@
                 <a:ea typeface="Trebuchet MS" pitchFamily="34" charset="-122"/>
                 <a:cs typeface="Trebuchet MS" pitchFamily="34" charset="-120"/>
               </a:rPr>
-              <a:t>n</a:t>
+              <a:t>e</a:t>
             </a:r>
             <a:endParaRPr lang="en-US" sz="900" dirty="0"/>
           </a:p>
@@ -15581,18 +15620,57 @@
       </p:sp>
       <p:sp>
         <p:nvSpPr>
-          <p:cNvPr id="42" name="Shape 40"/>
-          <p:cNvSpPr/>
-          <p:nvPr/>
-        </p:nvSpPr>
-        <p:spPr>
-          <a:xfrm>
-            <a:off x="4447032" y="4169664"/>
-            <a:ext cx="685800" cy="475488"/>
+          <p:cNvPr id="44" name="Text 42"/>
+          <p:cNvSpPr/>
+          <p:nvPr/>
+        </p:nvSpPr>
+        <p:spPr>
+          <a:xfrm>
+            <a:off x="5254752" y="4572000"/>
+            <a:ext cx="685800" cy="219456"/>
+          </a:xfrm>
+          <a:prstGeom prst="rect">
+            <a:avLst/>
+          </a:prstGeom>
+          <a:noFill/>
+          <a:ln/>
+        </p:spPr>
+        <p:txBody>
+          <a:bodyPr wrap="square" lIns="0" tIns="0" rIns="0" bIns="0" rtlCol="0" anchor="t"/>
+          <a:lstStyle/>
+          <a:p>
+            <a:pPr algn="ctr" indent="0" marL="0">
+              <a:buNone/>
+            </a:pPr>
+            <a:r>
+              <a:rPr lang="en-US" sz="750" i="1" dirty="0">
+                <a:solidFill>
+                  <a:srgbClr val="94A3B8"/>
+                </a:solidFill>
+                <a:latin typeface="Calibri" pitchFamily="34" charset="0"/>
+                <a:ea typeface="Calibri" pitchFamily="34" charset="-122"/>
+                <a:cs typeface="Calibri" pitchFamily="34" charset="-120"/>
+              </a:rPr>
+              <a:t>silent</a:t>
+            </a:r>
+            <a:endParaRPr lang="en-US" sz="750" dirty="0"/>
+          </a:p>
+        </p:txBody>
+      </p:sp>
+      <p:sp>
+        <p:nvSpPr>
+          <p:cNvPr id="45" name="Shape 43"/>
+          <p:cNvSpPr/>
+          <p:nvPr/>
+        </p:nvSpPr>
+        <p:spPr>
+          <a:xfrm>
+            <a:off x="6062472" y="4169664"/>
+            <a:ext cx="685800" cy="384048"/>
           </a:xfrm>
           <a:prstGeom prst="rect">
             <a:avLst>
-              <a:gd name="adj" fmla="val 7692"/>
+              <a:gd name="adj" fmla="val 9524"/>
             </a:avLst>
           </a:prstGeom>
           <a:solidFill>
@@ -15608,14 +15686,14 @@
       </p:sp>
       <p:sp>
         <p:nvSpPr>
-          <p:cNvPr id="43" name="Text 41"/>
-          <p:cNvSpPr/>
-          <p:nvPr/>
-        </p:nvSpPr>
-        <p:spPr>
-          <a:xfrm>
-            <a:off x="4447032" y="4169664"/>
-            <a:ext cx="685800" cy="475488"/>
+          <p:cNvPr id="46" name="Text 44"/>
+          <p:cNvSpPr/>
+          <p:nvPr/>
+        </p:nvSpPr>
+        <p:spPr>
+          <a:xfrm>
+            <a:off x="6062472" y="4169664"/>
+            <a:ext cx="685800" cy="384048"/>
           </a:xfrm>
           <a:prstGeom prst="rect">
             <a:avLst/>
@@ -15639,7 +15717,7 @@
                 <a:ea typeface="Trebuchet MS" pitchFamily="34" charset="-122"/>
                 <a:cs typeface="Trebuchet MS" pitchFamily="34" charset="-120"/>
               </a:rPr>
-              <a:t>d</a:t>
+              <a:t>f</a:t>
             </a:r>
             <a:endParaRPr lang="en-US" sz="900" dirty="0"/>
           </a:p>
@@ -15647,18 +15725,18 @@
       </p:sp>
       <p:sp>
         <p:nvSpPr>
-          <p:cNvPr id="44" name="Shape 42"/>
-          <p:cNvSpPr/>
-          <p:nvPr/>
-        </p:nvSpPr>
-        <p:spPr>
-          <a:xfrm>
-            <a:off x="5254752" y="4169664"/>
-            <a:ext cx="685800" cy="475488"/>
+          <p:cNvPr id="47" name="Shape 45"/>
+          <p:cNvSpPr/>
+          <p:nvPr/>
+        </p:nvSpPr>
+        <p:spPr>
+          <a:xfrm>
+            <a:off x="6870192" y="4169664"/>
+            <a:ext cx="685800" cy="384048"/>
           </a:xfrm>
           <a:prstGeom prst="rect">
             <a:avLst>
-              <a:gd name="adj" fmla="val 7692"/>
+              <a:gd name="adj" fmla="val 9524"/>
             </a:avLst>
           </a:prstGeom>
           <a:solidFill>
@@ -15674,14 +15752,14 @@
       </p:sp>
       <p:sp>
         <p:nvSpPr>
-          <p:cNvPr id="45" name="Text 43"/>
-          <p:cNvSpPr/>
-          <p:nvPr/>
-        </p:nvSpPr>
-        <p:spPr>
-          <a:xfrm>
-            <a:off x="5254752" y="4169664"/>
-            <a:ext cx="685800" cy="475488"/>
+          <p:cNvPr id="48" name="Text 46"/>
+          <p:cNvSpPr/>
+          <p:nvPr/>
+        </p:nvSpPr>
+        <p:spPr>
+          <a:xfrm>
+            <a:off x="6870192" y="4169664"/>
+            <a:ext cx="685800" cy="384048"/>
           </a:xfrm>
           <a:prstGeom prst="rect">
             <a:avLst/>
@@ -15705,7 +15783,7 @@
                 <a:ea typeface="Trebuchet MS" pitchFamily="34" charset="-122"/>
                 <a:cs typeface="Trebuchet MS" pitchFamily="34" charset="-120"/>
               </a:rPr>
-              <a:t>er</a:t>
+              <a:t>u</a:t>
             </a:r>
             <a:endParaRPr lang="en-US" sz="900" dirty="0"/>
           </a:p>
@@ -15713,18 +15791,18 @@
       </p:sp>
       <p:sp>
         <p:nvSpPr>
-          <p:cNvPr id="46" name="Shape 44"/>
-          <p:cNvSpPr/>
-          <p:nvPr/>
-        </p:nvSpPr>
-        <p:spPr>
-          <a:xfrm>
-            <a:off x="6062472" y="4169664"/>
-            <a:ext cx="685800" cy="475488"/>
+          <p:cNvPr id="49" name="Shape 47"/>
+          <p:cNvSpPr/>
+          <p:nvPr/>
+        </p:nvSpPr>
+        <p:spPr>
+          <a:xfrm>
+            <a:off x="7677912" y="4169664"/>
+            <a:ext cx="685800" cy="384048"/>
           </a:xfrm>
           <a:prstGeom prst="rect">
             <a:avLst>
-              <a:gd name="adj" fmla="val 7692"/>
+              <a:gd name="adj" fmla="val 9524"/>
             </a:avLst>
           </a:prstGeom>
           <a:solidFill>
@@ -15740,146 +15818,14 @@
       </p:sp>
       <p:sp>
         <p:nvSpPr>
-          <p:cNvPr id="47" name="Text 45"/>
-          <p:cNvSpPr/>
-          <p:nvPr/>
-        </p:nvSpPr>
-        <p:spPr>
-          <a:xfrm>
-            <a:off x="6062472" y="4169664"/>
-            <a:ext cx="685800" cy="475488"/>
-          </a:xfrm>
-          <a:prstGeom prst="rect">
-            <a:avLst/>
-          </a:prstGeom>
-          <a:noFill/>
-          <a:ln/>
-        </p:spPr>
-        <p:txBody>
-          <a:bodyPr wrap="square" lIns="0" tIns="0" rIns="0" bIns="0" rtlCol="0" anchor="ctr"/>
-          <a:lstStyle/>
-          <a:p>
-            <a:pPr algn="ctr" indent="0" marL="0">
-              <a:buNone/>
-            </a:pPr>
-            <a:r>
-              <a:rPr lang="en-US" sz="900" b="1" dirty="0">
-                <a:solidFill>
-                  <a:srgbClr val="9D174D"/>
-                </a:solidFill>
-                <a:latin typeface="Trebuchet MS" pitchFamily="34" charset="0"/>
-                <a:ea typeface="Trebuchet MS" pitchFamily="34" charset="-122"/>
-                <a:cs typeface="Trebuchet MS" pitchFamily="34" charset="-120"/>
-              </a:rPr>
-              <a:t>f</a:t>
-            </a:r>
-            <a:endParaRPr lang="en-US" sz="900" dirty="0"/>
-          </a:p>
-        </p:txBody>
-      </p:sp>
-      <p:sp>
-        <p:nvSpPr>
-          <p:cNvPr id="48" name="Shape 46"/>
-          <p:cNvSpPr/>
-          <p:nvPr/>
-        </p:nvSpPr>
-        <p:spPr>
-          <a:xfrm>
-            <a:off x="6870192" y="4169664"/>
-            <a:ext cx="685800" cy="475488"/>
-          </a:xfrm>
-          <a:prstGeom prst="rect">
-            <a:avLst>
-              <a:gd name="adj" fmla="val 7692"/>
-            </a:avLst>
-          </a:prstGeom>
-          <a:solidFill>
-            <a:srgbClr val="FFFFFF"/>
-          </a:solidFill>
-          <a:ln w="12700">
-            <a:solidFill>
-              <a:srgbClr val="DB2777"/>
-            </a:solidFill>
-            <a:prstDash val="solid"/>
-          </a:ln>
-        </p:spPr>
-      </p:sp>
-      <p:sp>
-        <p:nvSpPr>
-          <p:cNvPr id="49" name="Text 47"/>
-          <p:cNvSpPr/>
-          <p:nvPr/>
-        </p:nvSpPr>
-        <p:spPr>
-          <a:xfrm>
-            <a:off x="6870192" y="4169664"/>
-            <a:ext cx="685800" cy="475488"/>
-          </a:xfrm>
-          <a:prstGeom prst="rect">
-            <a:avLst/>
-          </a:prstGeom>
-          <a:noFill/>
-          <a:ln/>
-        </p:spPr>
-        <p:txBody>
-          <a:bodyPr wrap="square" lIns="0" tIns="0" rIns="0" bIns="0" rtlCol="0" anchor="ctr"/>
-          <a:lstStyle/>
-          <a:p>
-            <a:pPr algn="ctr" indent="0" marL="0">
-              <a:buNone/>
-            </a:pPr>
-            <a:r>
-              <a:rPr lang="en-US" sz="900" b="1" dirty="0">
-                <a:solidFill>
-                  <a:srgbClr val="9D174D"/>
-                </a:solidFill>
-                <a:latin typeface="Trebuchet MS" pitchFamily="34" charset="0"/>
-                <a:ea typeface="Trebuchet MS" pitchFamily="34" charset="-122"/>
-                <a:cs typeface="Trebuchet MS" pitchFamily="34" charset="-120"/>
-              </a:rPr>
-              <a:t>u</a:t>
-            </a:r>
-            <a:endParaRPr lang="en-US" sz="900" dirty="0"/>
-          </a:p>
-        </p:txBody>
-      </p:sp>
-      <p:sp>
-        <p:nvSpPr>
-          <p:cNvPr id="50" name="Shape 48"/>
+          <p:cNvPr id="50" name="Text 48"/>
           <p:cNvSpPr/>
           <p:nvPr/>
         </p:nvSpPr>
         <p:spPr>
           <a:xfrm>
             <a:off x="7677912" y="4169664"/>
-            <a:ext cx="685800" cy="475488"/>
-          </a:xfrm>
-          <a:prstGeom prst="rect">
-            <a:avLst>
-              <a:gd name="adj" fmla="val 7692"/>
-            </a:avLst>
-          </a:prstGeom>
-          <a:solidFill>
-            <a:srgbClr val="FFFFFF"/>
-          </a:solidFill>
-          <a:ln w="12700">
-            <a:solidFill>
-              <a:srgbClr val="DB2777"/>
-            </a:solidFill>
-            <a:prstDash val="solid"/>
-          </a:ln>
-        </p:spPr>
-      </p:sp>
-      <p:sp>
-        <p:nvSpPr>
-          <p:cNvPr id="51" name="Text 49"/>
-          <p:cNvSpPr/>
-          <p:nvPr/>
-        </p:nvSpPr>
-        <p:spPr>
-          <a:xfrm>
-            <a:off x="7677912" y="4169664"/>
-            <a:ext cx="685800" cy="475488"/>
+            <a:ext cx="685800" cy="384048"/>
           </a:xfrm>
           <a:prstGeom prst="rect">
             <a:avLst/>
@@ -17246,7 +17192,7 @@
                 <a:ea typeface="Calibri" pitchFamily="34" charset="-122"/>
                 <a:cs typeface="Calibri" pitchFamily="34" charset="-120"/>
               </a:rPr>
-              <a:t>playful</a:t>
+              <a:t>cheerful</a:t>
             </a:r>
             <a:pPr algn="l" indent="0" marL="0">
               <a:buNone/>
@@ -17260,7 +17206,7 @@
                 <a:ea typeface="Calibri" pitchFamily="34" charset="-122"/>
                 <a:cs typeface="Calibri" pitchFamily="34" charset="-120"/>
               </a:rPr>
-              <a:t> puppy was so </a:t>
+              <a:t> children were </a:t>
             </a:r>
             <a:pPr algn="l" indent="0" marL="0">
               <a:buNone/>
@@ -17277,7 +17223,7 @@
                 <a:ea typeface="Calibri" pitchFamily="34" charset="-122"/>
                 <a:cs typeface="Calibri" pitchFamily="34" charset="-120"/>
               </a:rPr>
-              <a:t>cheerful</a:t>
+              <a:t>playful</a:t>
             </a:r>
             <a:pPr algn="l" indent="0" marL="0">
               <a:buNone/>
@@ -17308,7 +17254,7 @@
                 <a:ea typeface="Calibri" pitchFamily="34" charset="-122"/>
                 <a:cs typeface="Calibri" pitchFamily="34" charset="-120"/>
               </a:rPr>
-              <a:t>colourful</a:t>
+              <a:t>helpful</a:t>
             </a:r>
             <a:pPr algn="l" indent="0" marL="0">
               <a:buNone/>
@@ -17322,7 +17268,7 @@
                 <a:ea typeface="Calibri" pitchFamily="34" charset="-122"/>
                 <a:cs typeface="Calibri" pitchFamily="34" charset="-120"/>
               </a:rPr>
-              <a:t> with its bright bandanna.</a:t>
+              <a:t> during the school camp.</a:t>
             </a:r>
             <a:endParaRPr lang="en-US" sz="1800" dirty="0"/>
           </a:p>
@@ -17477,7 +17423,7 @@
                 <a:ea typeface="Trebuchet MS" pitchFamily="34" charset="-122"/>
                 <a:cs typeface="Trebuchet MS" pitchFamily="34" charset="-120"/>
               </a:rPr>
-              <a:t>playful</a:t>
+              <a:t>cheerful</a:t>
             </a:r>
             <a:endParaRPr lang="en-US" sz="1400" dirty="0"/>
           </a:p>
@@ -17605,7 +17551,7 @@
                 <a:ea typeface="Trebuchet MS" pitchFamily="34" charset="-122"/>
                 <a:cs typeface="Trebuchet MS" pitchFamily="34" charset="-120"/>
               </a:rPr>
-              <a:t>cheerful</a:t>
+              <a:t>playful</a:t>
             </a:r>
             <a:endParaRPr lang="en-US" sz="1400" dirty="0"/>
           </a:p>
@@ -17733,7 +17679,7 @@
                 <a:ea typeface="Trebuchet MS" pitchFamily="34" charset="-122"/>
                 <a:cs typeface="Trebuchet MS" pitchFamily="34" charset="-120"/>
               </a:rPr>
-              <a:t>colourful</a:t>
+              <a:t>helpful</a:t>
             </a:r>
             <a:endParaRPr lang="en-US" sz="1400" dirty="0"/>
           </a:p>
@@ -18203,7 +18149,7 @@
                 <a:ea typeface="Trebuchet MS" pitchFamily="34" charset="-122"/>
                 <a:cs typeface="Trebuchet MS" pitchFamily="34" charset="-120"/>
               </a:rPr>
-              <a:t>playful</a:t>
+              <a:t>cheerful</a:t>
             </a:r>
             <a:endParaRPr lang="en-US" sz="2800" dirty="0"/>
           </a:p>
@@ -19030,7 +18976,7 @@
                 <a:ea typeface="Trebuchet MS" pitchFamily="34" charset="-122"/>
                 <a:cs typeface="Trebuchet MS" pitchFamily="34" charset="-120"/>
               </a:rPr>
-              <a:t>playful</a:t>
+              <a:t>cheerful</a:t>
             </a:r>
             <a:endParaRPr lang="en-US" sz="2800" dirty="0"/>
           </a:p>
@@ -19169,7 +19115,7 @@
                 <a:ea typeface="Trebuchet MS" pitchFamily="34" charset="-122"/>
                 <a:cs typeface="Trebuchet MS" pitchFamily="34" charset="-120"/>
               </a:rPr>
-              <a:t>play</a:t>
+              <a:t>cheer</a:t>
             </a:r>
             <a:endParaRPr lang="en-US" sz="1300" dirty="0"/>
           </a:p>
@@ -19208,7 +19154,7 @@
                 <a:ea typeface="Calibri" pitchFamily="34" charset="-122"/>
                 <a:cs typeface="Calibri" pitchFamily="34" charset="-120"/>
               </a:rPr>
-              <a:t>to have fun or engage in games</a:t>
+              <a:t>happiness, good spirits</a:t>
             </a:r>
             <a:endParaRPr lang="en-US" sz="850" dirty="0"/>
           </a:p>
@@ -19320,7 +19266,7 @@
                 <a:ea typeface="Calibri" pitchFamily="34" charset="-122"/>
                 <a:cs typeface="Calibri" pitchFamily="34" charset="-120"/>
               </a:rPr>
-              <a:t>full of</a:t>
+              <a:t>full of, having quality</a:t>
             </a:r>
             <a:endParaRPr lang="en-US" sz="850" dirty="0"/>
           </a:p>
@@ -20015,7 +19961,7 @@
                 <a:ea typeface="Trebuchet MS" pitchFamily="34" charset="-122"/>
                 <a:cs typeface="Trebuchet MS" pitchFamily="34" charset="-120"/>
               </a:rPr>
-              <a:t>playful</a:t>
+              <a:t>cheerful</a:t>
             </a:r>
             <a:endParaRPr lang="en-US" sz="2800" dirty="0"/>
           </a:p>
@@ -20154,7 +20100,7 @@
                 <a:ea typeface="Trebuchet MS" pitchFamily="34" charset="-122"/>
                 <a:cs typeface="Trebuchet MS" pitchFamily="34" charset="-120"/>
               </a:rPr>
-              <a:t>play</a:t>
+              <a:t>cheer</a:t>
             </a:r>
             <a:endParaRPr lang="en-US" sz="1300" dirty="0"/>
           </a:p>
@@ -20193,7 +20139,7 @@
                 <a:ea typeface="Calibri" pitchFamily="34" charset="-122"/>
                 <a:cs typeface="Calibri" pitchFamily="34" charset="-120"/>
               </a:rPr>
-              <a:t>to have fun or engage in games</a:t>
+              <a:t>happiness, good spirits</a:t>
             </a:r>
             <a:endParaRPr lang="en-US" sz="850" dirty="0"/>
           </a:p>
@@ -20305,7 +20251,7 @@
                 <a:ea typeface="Calibri" pitchFamily="34" charset="-122"/>
                 <a:cs typeface="Calibri" pitchFamily="34" charset="-120"/>
               </a:rPr>
-              <a:t>full of</a:t>
+              <a:t>full of, having quality</a:t>
             </a:r>
             <a:endParaRPr lang="en-US" sz="850" dirty="0"/>
           </a:p>
@@ -20464,7 +20410,7 @@
                 <a:ea typeface="Trebuchet MS" pitchFamily="34" charset="-122"/>
                 <a:cs typeface="Trebuchet MS" pitchFamily="34" charset="-120"/>
               </a:rPr>
-              <a:t>play</a:t>
+              <a:t>cheer</a:t>
             </a:r>
             <a:endParaRPr lang="en-US" sz="1400" dirty="0"/>
           </a:p>
@@ -21132,7 +21078,7 @@
                 <a:ea typeface="Trebuchet MS" pitchFamily="34" charset="-122"/>
                 <a:cs typeface="Trebuchet MS" pitchFamily="34" charset="-120"/>
               </a:rPr>
-              <a:t>playful</a:t>
+              <a:t>cheerful</a:t>
             </a:r>
             <a:endParaRPr lang="en-US" sz="2800" dirty="0"/>
           </a:p>
@@ -21271,7 +21217,7 @@
                 <a:ea typeface="Trebuchet MS" pitchFamily="34" charset="-122"/>
                 <a:cs typeface="Trebuchet MS" pitchFamily="34" charset="-120"/>
               </a:rPr>
-              <a:t>play</a:t>
+              <a:t>cheer</a:t>
             </a:r>
             <a:endParaRPr lang="en-US" sz="1300" dirty="0"/>
           </a:p>
@@ -21310,7 +21256,7 @@
                 <a:ea typeface="Calibri" pitchFamily="34" charset="-122"/>
                 <a:cs typeface="Calibri" pitchFamily="34" charset="-120"/>
               </a:rPr>
-              <a:t>to have fun or engage in games</a:t>
+              <a:t>happiness, good spirits</a:t>
             </a:r>
             <a:endParaRPr lang="en-US" sz="850" dirty="0"/>
           </a:p>
@@ -21422,7 +21368,7 @@
                 <a:ea typeface="Calibri" pitchFamily="34" charset="-122"/>
                 <a:cs typeface="Calibri" pitchFamily="34" charset="-120"/>
               </a:rPr>
-              <a:t>full of</a:t>
+              <a:t>full of, having quality</a:t>
             </a:r>
             <a:endParaRPr lang="en-US" sz="850" dirty="0"/>
           </a:p>
@@ -21581,7 +21527,7 @@
                 <a:ea typeface="Trebuchet MS" pitchFamily="34" charset="-122"/>
                 <a:cs typeface="Trebuchet MS" pitchFamily="34" charset="-120"/>
               </a:rPr>
-              <a:t>play</a:t>
+              <a:t>cheer</a:t>
             </a:r>
             <a:endParaRPr lang="en-US" sz="1400" dirty="0"/>
           </a:p>
@@ -21793,7 +21739,7 @@
         </p:nvSpPr>
         <p:spPr>
           <a:xfrm>
-            <a:off x="2427732" y="4169664"/>
+            <a:off x="2254649" y="4169664"/>
             <a:ext cx="685800" cy="475488"/>
           </a:xfrm>
           <a:prstGeom prst="rect">
@@ -21820,7 +21766,7 @@
         </p:nvSpPr>
         <p:spPr>
           <a:xfrm>
-            <a:off x="2427732" y="4169664"/>
+            <a:off x="2254649" y="4169664"/>
             <a:ext cx="685800" cy="475488"/>
           </a:xfrm>
           <a:prstGeom prst="rect">
@@ -21845,7 +21791,7 @@
                 <a:ea typeface="Trebuchet MS" pitchFamily="34" charset="-122"/>
                 <a:cs typeface="Trebuchet MS" pitchFamily="34" charset="-120"/>
               </a:rPr>
-              <a:t>pl</a:t>
+              <a:t>ch</a:t>
             </a:r>
             <a:endParaRPr lang="en-US" sz="900" dirty="0"/>
           </a:p>
@@ -21859,7 +21805,7 @@
         </p:nvSpPr>
         <p:spPr>
           <a:xfrm>
-            <a:off x="3639312" y="4169664"/>
+            <a:off x="3293146" y="4169664"/>
             <a:ext cx="685800" cy="475488"/>
           </a:xfrm>
           <a:prstGeom prst="rect">
@@ -21886,7 +21832,7 @@
         </p:nvSpPr>
         <p:spPr>
           <a:xfrm>
-            <a:off x="3639312" y="4169664"/>
+            <a:off x="3293146" y="4169664"/>
             <a:ext cx="685800" cy="475488"/>
           </a:xfrm>
           <a:prstGeom prst="rect">
@@ -21911,7 +21857,7 @@
                 <a:ea typeface="Trebuchet MS" pitchFamily="34" charset="-122"/>
                 <a:cs typeface="Trebuchet MS" pitchFamily="34" charset="-120"/>
               </a:rPr>
-              <a:t>ay</a:t>
+              <a:t>ee</a:t>
             </a:r>
             <a:endParaRPr lang="en-US" sz="900" dirty="0"/>
           </a:p>
@@ -21925,7 +21871,7 @@
         </p:nvSpPr>
         <p:spPr>
           <a:xfrm>
-            <a:off x="4850892" y="4169664"/>
+            <a:off x="4331643" y="4169664"/>
             <a:ext cx="685800" cy="475488"/>
           </a:xfrm>
           <a:prstGeom prst="rect">
@@ -21952,7 +21898,7 @@
         </p:nvSpPr>
         <p:spPr>
           <a:xfrm>
-            <a:off x="4850892" y="4169664"/>
+            <a:off x="4331643" y="4169664"/>
             <a:ext cx="685800" cy="475488"/>
           </a:xfrm>
           <a:prstGeom prst="rect">
@@ -21977,7 +21923,7 @@
                 <a:ea typeface="Trebuchet MS" pitchFamily="34" charset="-122"/>
                 <a:cs typeface="Trebuchet MS" pitchFamily="34" charset="-120"/>
               </a:rPr>
-              <a:t>f</a:t>
+              <a:t>r</a:t>
             </a:r>
             <a:endParaRPr lang="en-US" sz="900" dirty="0"/>
           </a:p>
@@ -21991,7 +21937,7 @@
         </p:nvSpPr>
         <p:spPr>
           <a:xfrm>
-            <a:off x="6062472" y="4169664"/>
+            <a:off x="5370141" y="4169664"/>
             <a:ext cx="685800" cy="475488"/>
           </a:xfrm>
           <a:prstGeom prst="rect">
@@ -22018,7 +21964,7 @@
         </p:nvSpPr>
         <p:spPr>
           <a:xfrm>
-            <a:off x="6062472" y="4169664"/>
+            <a:off x="5370141" y="4169664"/>
             <a:ext cx="685800" cy="475488"/>
           </a:xfrm>
           <a:prstGeom prst="rect">
@@ -22043,7 +21989,7 @@
                 <a:ea typeface="Trebuchet MS" pitchFamily="34" charset="-122"/>
                 <a:cs typeface="Trebuchet MS" pitchFamily="34" charset="-120"/>
               </a:rPr>
-              <a:t>u</a:t>
+              <a:t>f</a:t>
             </a:r>
             <a:endParaRPr lang="en-US" sz="900" dirty="0"/>
           </a:p>
@@ -22057,7 +22003,7 @@
         </p:nvSpPr>
         <p:spPr>
           <a:xfrm>
-            <a:off x="7274052" y="4169664"/>
+            <a:off x="6408638" y="4169664"/>
             <a:ext cx="685800" cy="475488"/>
           </a:xfrm>
           <a:prstGeom prst="rect">
@@ -22084,7 +22030,73 @@
         </p:nvSpPr>
         <p:spPr>
           <a:xfrm>
-            <a:off x="7274052" y="4169664"/>
+            <a:off x="6408638" y="4169664"/>
+            <a:ext cx="685800" cy="475488"/>
+          </a:xfrm>
+          <a:prstGeom prst="rect">
+            <a:avLst/>
+          </a:prstGeom>
+          <a:noFill/>
+          <a:ln/>
+        </p:spPr>
+        <p:txBody>
+          <a:bodyPr wrap="square" lIns="0" tIns="0" rIns="0" bIns="0" rtlCol="0" anchor="ctr"/>
+          <a:lstStyle/>
+          <a:p>
+            <a:pPr algn="ctr" indent="0" marL="0">
+              <a:buNone/>
+            </a:pPr>
+            <a:r>
+              <a:rPr lang="en-US" sz="900" b="1" dirty="0">
+                <a:solidFill>
+                  <a:srgbClr val="9D174D"/>
+                </a:solidFill>
+                <a:latin typeface="Trebuchet MS" pitchFamily="34" charset="0"/>
+                <a:ea typeface="Trebuchet MS" pitchFamily="34" charset="-122"/>
+                <a:cs typeface="Trebuchet MS" pitchFamily="34" charset="-120"/>
+              </a:rPr>
+              <a:t>u</a:t>
+            </a:r>
+            <a:endParaRPr lang="en-US" sz="900" dirty="0"/>
+          </a:p>
+        </p:txBody>
+      </p:sp>
+      <p:sp>
+        <p:nvSpPr>
+          <p:cNvPr id="43" name="Shape 41"/>
+          <p:cNvSpPr/>
+          <p:nvPr/>
+        </p:nvSpPr>
+        <p:spPr>
+          <a:xfrm>
+            <a:off x="7447135" y="4169664"/>
+            <a:ext cx="685800" cy="475488"/>
+          </a:xfrm>
+          <a:prstGeom prst="rect">
+            <a:avLst>
+              <a:gd name="adj" fmla="val 7692"/>
+            </a:avLst>
+          </a:prstGeom>
+          <a:solidFill>
+            <a:srgbClr val="FFFFFF"/>
+          </a:solidFill>
+          <a:ln w="12700">
+            <a:solidFill>
+              <a:srgbClr val="DB2777"/>
+            </a:solidFill>
+            <a:prstDash val="solid"/>
+          </a:ln>
+        </p:spPr>
+      </p:sp>
+      <p:sp>
+        <p:nvSpPr>
+          <p:cNvPr id="44" name="Text 42"/>
+          <p:cNvSpPr/>
+          <p:nvPr/>
+        </p:nvSpPr>
+        <p:spPr>
+          <a:xfrm>
+            <a:off x="7447135" y="4169664"/>
             <a:ext cx="685800" cy="475488"/>
           </a:xfrm>
           <a:prstGeom prst="rect">
@@ -22540,7 +22552,7 @@
                 <a:ea typeface="Trebuchet MS" pitchFamily="34" charset="-122"/>
                 <a:cs typeface="Trebuchet MS" pitchFamily="34" charset="-120"/>
               </a:rPr>
-              <a:t>cheerful</a:t>
+              <a:t>playful</a:t>
             </a:r>
             <a:endParaRPr lang="en-US" sz="2800" dirty="0"/>
           </a:p>
@@ -23367,7 +23379,7 @@
                 <a:ea typeface="Trebuchet MS" pitchFamily="34" charset="-122"/>
                 <a:cs typeface="Trebuchet MS" pitchFamily="34" charset="-120"/>
               </a:rPr>
-              <a:t>cheerful</a:t>
+              <a:t>playful</a:t>
             </a:r>
             <a:endParaRPr lang="en-US" sz="2800" dirty="0"/>
           </a:p>
@@ -23506,7 +23518,7 @@
                 <a:ea typeface="Trebuchet MS" pitchFamily="34" charset="-122"/>
                 <a:cs typeface="Trebuchet MS" pitchFamily="34" charset="-120"/>
               </a:rPr>
-              <a:t>cheer</a:t>
+              <a:t>play</a:t>
             </a:r>
             <a:endParaRPr lang="en-US" sz="1300" dirty="0"/>
           </a:p>
@@ -23545,7 +23557,7 @@
                 <a:ea typeface="Calibri" pitchFamily="34" charset="-122"/>
                 <a:cs typeface="Calibri" pitchFamily="34" charset="-120"/>
               </a:rPr>
-              <a:t>happiness or good spirits</a:t>
+              <a:t>to have fun or engage in games</a:t>
             </a:r>
             <a:endParaRPr lang="en-US" sz="850" dirty="0"/>
           </a:p>
@@ -23657,7 +23669,7 @@
                 <a:ea typeface="Calibri" pitchFamily="34" charset="-122"/>
                 <a:cs typeface="Calibri" pitchFamily="34" charset="-120"/>
               </a:rPr>
-              <a:t>full of</a:t>
+              <a:t>full of, having quality</a:t>
             </a:r>
             <a:endParaRPr lang="en-US" sz="850" dirty="0"/>
           </a:p>
@@ -25071,7 +25083,7 @@
                 <a:ea typeface="Trebuchet MS" pitchFamily="34" charset="-122"/>
                 <a:cs typeface="Trebuchet MS" pitchFamily="34" charset="-120"/>
               </a:rPr>
-              <a:t>cheerful</a:t>
+              <a:t>playful</a:t>
             </a:r>
             <a:endParaRPr lang="en-US" sz="2800" dirty="0"/>
           </a:p>
@@ -25210,7 +25222,7 @@
                 <a:ea typeface="Trebuchet MS" pitchFamily="34" charset="-122"/>
                 <a:cs typeface="Trebuchet MS" pitchFamily="34" charset="-120"/>
               </a:rPr>
-              <a:t>cheer</a:t>
+              <a:t>play</a:t>
             </a:r>
             <a:endParaRPr lang="en-US" sz="1300" dirty="0"/>
           </a:p>
@@ -25249,7 +25261,7 @@
                 <a:ea typeface="Calibri" pitchFamily="34" charset="-122"/>
                 <a:cs typeface="Calibri" pitchFamily="34" charset="-120"/>
               </a:rPr>
-              <a:t>happiness or good spirits</a:t>
+              <a:t>to have fun or engage in games</a:t>
             </a:r>
             <a:endParaRPr lang="en-US" sz="850" dirty="0"/>
           </a:p>
@@ -25361,7 +25373,7 @@
                 <a:ea typeface="Calibri" pitchFamily="34" charset="-122"/>
                 <a:cs typeface="Calibri" pitchFamily="34" charset="-120"/>
               </a:rPr>
-              <a:t>full of</a:t>
+              <a:t>full of, having quality</a:t>
             </a:r>
             <a:endParaRPr lang="en-US" sz="850" dirty="0"/>
           </a:p>
@@ -25520,7 +25532,7 @@
                 <a:ea typeface="Trebuchet MS" pitchFamily="34" charset="-122"/>
                 <a:cs typeface="Trebuchet MS" pitchFamily="34" charset="-120"/>
               </a:rPr>
-              <a:t>cheer</a:t>
+              <a:t>play</a:t>
             </a:r>
             <a:endParaRPr lang="en-US" sz="1400" dirty="0"/>
           </a:p>
@@ -26188,7 +26200,7 @@
                 <a:ea typeface="Trebuchet MS" pitchFamily="34" charset="-122"/>
                 <a:cs typeface="Trebuchet MS" pitchFamily="34" charset="-120"/>
               </a:rPr>
-              <a:t>cheerful</a:t>
+              <a:t>playful</a:t>
             </a:r>
             <a:endParaRPr lang="en-US" sz="2800" dirty="0"/>
           </a:p>
@@ -26327,7 +26339,7 @@
                 <a:ea typeface="Trebuchet MS" pitchFamily="34" charset="-122"/>
                 <a:cs typeface="Trebuchet MS" pitchFamily="34" charset="-120"/>
               </a:rPr>
-              <a:t>cheer</a:t>
+              <a:t>play</a:t>
             </a:r>
             <a:endParaRPr lang="en-US" sz="1300" dirty="0"/>
           </a:p>
@@ -26366,7 +26378,7 @@
                 <a:ea typeface="Calibri" pitchFamily="34" charset="-122"/>
                 <a:cs typeface="Calibri" pitchFamily="34" charset="-120"/>
               </a:rPr>
-              <a:t>happiness or good spirits</a:t>
+              <a:t>to have fun or engage in games</a:t>
             </a:r>
             <a:endParaRPr lang="en-US" sz="850" dirty="0"/>
           </a:p>
@@ -26478,7 +26490,7 @@
                 <a:ea typeface="Calibri" pitchFamily="34" charset="-122"/>
                 <a:cs typeface="Calibri" pitchFamily="34" charset="-120"/>
               </a:rPr>
-              <a:t>full of</a:t>
+              <a:t>full of, having quality</a:t>
             </a:r>
             <a:endParaRPr lang="en-US" sz="850" dirty="0"/>
           </a:p>
@@ -26637,7 +26649,7 @@
                 <a:ea typeface="Trebuchet MS" pitchFamily="34" charset="-122"/>
                 <a:cs typeface="Trebuchet MS" pitchFamily="34" charset="-120"/>
               </a:rPr>
-              <a:t>cheer</a:t>
+              <a:t>play</a:t>
             </a:r>
             <a:endParaRPr lang="en-US" sz="1400" dirty="0"/>
           </a:p>
@@ -26901,7 +26913,7 @@
                 <a:ea typeface="Trebuchet MS" pitchFamily="34" charset="-122"/>
                 <a:cs typeface="Trebuchet MS" pitchFamily="34" charset="-120"/>
               </a:rPr>
-              <a:t>ch</a:t>
+              <a:t>p</a:t>
             </a:r>
             <a:endParaRPr lang="en-US" sz="900" dirty="0"/>
           </a:p>
@@ -26967,7 +26979,7 @@
                 <a:ea typeface="Trebuchet MS" pitchFamily="34" charset="-122"/>
                 <a:cs typeface="Trebuchet MS" pitchFamily="34" charset="-120"/>
               </a:rPr>
-              <a:t>ee</a:t>
+              <a:t>l</a:t>
             </a:r>
             <a:endParaRPr lang="en-US" sz="900" dirty="0"/>
           </a:p>
@@ -27033,7 +27045,7 @@
                 <a:ea typeface="Trebuchet MS" pitchFamily="34" charset="-122"/>
                 <a:cs typeface="Trebuchet MS" pitchFamily="34" charset="-120"/>
               </a:rPr>
-              <a:t>r</a:t>
+              <a:t>ay</a:t>
             </a:r>
             <a:endParaRPr lang="en-US" sz="900" dirty="0"/>
           </a:p>
@@ -27662,7 +27674,7 @@
                 <a:ea typeface="Trebuchet MS" pitchFamily="34" charset="-122"/>
                 <a:cs typeface="Trebuchet MS" pitchFamily="34" charset="-120"/>
               </a:rPr>
-              <a:t>colourful</a:t>
+              <a:t>helpful</a:t>
             </a:r>
             <a:endParaRPr lang="en-US" sz="2800" dirty="0"/>
           </a:p>
@@ -28489,7 +28501,7 @@
                 <a:ea typeface="Trebuchet MS" pitchFamily="34" charset="-122"/>
                 <a:cs typeface="Trebuchet MS" pitchFamily="34" charset="-120"/>
               </a:rPr>
-              <a:t>colourful</a:t>
+              <a:t>helpful</a:t>
             </a:r>
             <a:endParaRPr lang="en-US" sz="2800" dirty="0"/>
           </a:p>
@@ -28628,7 +28640,7 @@
                 <a:ea typeface="Trebuchet MS" pitchFamily="34" charset="-122"/>
                 <a:cs typeface="Trebuchet MS" pitchFamily="34" charset="-120"/>
               </a:rPr>
-              <a:t>colour</a:t>
+              <a:t>help</a:t>
             </a:r>
             <a:endParaRPr lang="en-US" sz="1300" dirty="0"/>
           </a:p>
@@ -28667,7 +28679,7 @@
                 <a:ea typeface="Calibri" pitchFamily="34" charset="-122"/>
                 <a:cs typeface="Calibri" pitchFamily="34" charset="-120"/>
               </a:rPr>
-              <a:t>hue or shade seen by the eye</a:t>
+              <a:t>to assist or support someone</a:t>
             </a:r>
             <a:endParaRPr lang="en-US" sz="850" dirty="0"/>
           </a:p>
@@ -28779,7 +28791,7 @@
                 <a:ea typeface="Calibri" pitchFamily="34" charset="-122"/>
                 <a:cs typeface="Calibri" pitchFamily="34" charset="-120"/>
               </a:rPr>
-              <a:t>full of</a:t>
+              <a:t>full of, having quality</a:t>
             </a:r>
             <a:endParaRPr lang="en-US" sz="850" dirty="0"/>
           </a:p>
@@ -29474,7 +29486,7 @@
                 <a:ea typeface="Trebuchet MS" pitchFamily="34" charset="-122"/>
                 <a:cs typeface="Trebuchet MS" pitchFamily="34" charset="-120"/>
               </a:rPr>
-              <a:t>colourful</a:t>
+              <a:t>helpful</a:t>
             </a:r>
             <a:endParaRPr lang="en-US" sz="2800" dirty="0"/>
           </a:p>
@@ -29613,7 +29625,7 @@
                 <a:ea typeface="Trebuchet MS" pitchFamily="34" charset="-122"/>
                 <a:cs typeface="Trebuchet MS" pitchFamily="34" charset="-120"/>
               </a:rPr>
-              <a:t>colour</a:t>
+              <a:t>help</a:t>
             </a:r>
             <a:endParaRPr lang="en-US" sz="1300" dirty="0"/>
           </a:p>
@@ -29652,7 +29664,7 @@
                 <a:ea typeface="Calibri" pitchFamily="34" charset="-122"/>
                 <a:cs typeface="Calibri" pitchFamily="34" charset="-120"/>
               </a:rPr>
-              <a:t>hue or shade seen by the eye</a:t>
+              <a:t>to assist or support someone</a:t>
             </a:r>
             <a:endParaRPr lang="en-US" sz="850" dirty="0"/>
           </a:p>
@@ -29764,7 +29776,7 @@
                 <a:ea typeface="Calibri" pitchFamily="34" charset="-122"/>
                 <a:cs typeface="Calibri" pitchFamily="34" charset="-120"/>
               </a:rPr>
-              <a:t>full of</a:t>
+              <a:t>full of, having quality</a:t>
             </a:r>
             <a:endParaRPr lang="en-US" sz="850" dirty="0"/>
           </a:p>
@@ -29871,7 +29883,7 @@
         </p:nvSpPr>
         <p:spPr>
           <a:xfrm>
-            <a:off x="2313432" y="3364992"/>
+            <a:off x="2999232" y="3364992"/>
             <a:ext cx="1645920" cy="475488"/>
           </a:xfrm>
           <a:prstGeom prst="rect">
@@ -29898,7 +29910,7 @@
         </p:nvSpPr>
         <p:spPr>
           <a:xfrm>
-            <a:off x="2313432" y="3364992"/>
+            <a:off x="2999232" y="3364992"/>
             <a:ext cx="1645920" cy="475488"/>
           </a:xfrm>
           <a:prstGeom prst="rect">
@@ -29923,7 +29935,7 @@
                 <a:ea typeface="Trebuchet MS" pitchFamily="34" charset="-122"/>
                 <a:cs typeface="Trebuchet MS" pitchFamily="34" charset="-120"/>
               </a:rPr>
-              <a:t>col</a:t>
+              <a:t>help</a:t>
             </a:r>
             <a:endParaRPr lang="en-US" sz="1400" dirty="0"/>
           </a:p>
@@ -29937,8 +29949,8 @@
         </p:nvSpPr>
         <p:spPr>
           <a:xfrm>
-            <a:off x="3959352" y="3364992"/>
-            <a:ext cx="411480" cy="475488"/>
+            <a:off x="4645152" y="3364992"/>
+            <a:ext cx="1097280" cy="475488"/>
           </a:xfrm>
           <a:prstGeom prst="rect">
             <a:avLst/>
@@ -29976,7 +29988,7 @@
         </p:nvSpPr>
         <p:spPr>
           <a:xfrm>
-            <a:off x="4370832" y="3364992"/>
+            <a:off x="5742432" y="3364992"/>
             <a:ext cx="1645920" cy="475488"/>
           </a:xfrm>
           <a:prstGeom prst="rect">
@@ -30003,7 +30015,7 @@
         </p:nvSpPr>
         <p:spPr>
           <a:xfrm>
-            <a:off x="4370832" y="3364992"/>
+            <a:off x="5742432" y="3364992"/>
             <a:ext cx="1645920" cy="475488"/>
           </a:xfrm>
           <a:prstGeom prst="rect">
@@ -30028,7 +30040,7 @@
                 <a:ea typeface="Trebuchet MS" pitchFamily="34" charset="-122"/>
                 <a:cs typeface="Trebuchet MS" pitchFamily="34" charset="-120"/>
               </a:rPr>
-              <a:t>our</a:t>
+              <a:t>ful</a:t>
             </a:r>
             <a:endParaRPr lang="en-US" sz="1400" dirty="0"/>
           </a:p>
@@ -30036,14 +30048,41 @@
       </p:sp>
       <p:sp>
         <p:nvSpPr>
-          <p:cNvPr id="30" name="Text 28"/>
-          <p:cNvSpPr/>
-          <p:nvPr/>
-        </p:nvSpPr>
-        <p:spPr>
-          <a:xfrm>
-            <a:off x="6016752" y="3364992"/>
-            <a:ext cx="411480" cy="475488"/>
+          <p:cNvPr id="30" name="Shape 28"/>
+          <p:cNvSpPr/>
+          <p:nvPr/>
+        </p:nvSpPr>
+        <p:spPr>
+          <a:xfrm>
+            <a:off x="365760" y="4096512"/>
+            <a:ext cx="1371600" cy="804672"/>
+          </a:xfrm>
+          <a:prstGeom prst="rect">
+            <a:avLst>
+              <a:gd name="adj" fmla="val 6818"/>
+            </a:avLst>
+          </a:prstGeom>
+          <a:solidFill>
+            <a:srgbClr val="E2E8F0"/>
+          </a:solidFill>
+          <a:ln w="12700">
+            <a:solidFill>
+              <a:srgbClr val="E2E8F0"/>
+            </a:solidFill>
+            <a:prstDash val="solid"/>
+          </a:ln>
+        </p:spPr>
+      </p:sp>
+      <p:sp>
+        <p:nvSpPr>
+          <p:cNvPr id="31" name="Text 29"/>
+          <p:cNvSpPr/>
+          <p:nvPr/>
+        </p:nvSpPr>
+        <p:spPr>
+          <a:xfrm>
+            <a:off x="365760" y="4096512"/>
+            <a:ext cx="1371600" cy="804672"/>
           </a:xfrm>
           <a:prstGeom prst="rect">
             <a:avLst/>
@@ -30059,96 +30098,30 @@
               <a:buNone/>
             </a:pPr>
             <a:r>
-              <a:rPr lang="en-US" sz="1600" b="1" dirty="0">
-                <a:solidFill>
-                  <a:srgbClr val="0D9488"/>
+              <a:rPr lang="en-US" sz="1100" b="1" dirty="0">
+                <a:solidFill>
+                  <a:srgbClr val="475569"/>
                 </a:solidFill>
                 <a:latin typeface="Trebuchet MS" pitchFamily="34" charset="0"/>
                 <a:ea typeface="Trebuchet MS" pitchFamily="34" charset="-122"/>
                 <a:cs typeface="Trebuchet MS" pitchFamily="34" charset="-120"/>
               </a:rPr>
-              <a:t>·</a:t>
-            </a:r>
-            <a:endParaRPr lang="en-US" sz="1600" dirty="0"/>
-          </a:p>
-        </p:txBody>
-      </p:sp>
-      <p:sp>
-        <p:nvSpPr>
-          <p:cNvPr id="31" name="Shape 29"/>
-          <p:cNvSpPr/>
-          <p:nvPr/>
-        </p:nvSpPr>
-        <p:spPr>
-          <a:xfrm>
-            <a:off x="6428232" y="3364992"/>
-            <a:ext cx="1645920" cy="475488"/>
-          </a:xfrm>
-          <a:prstGeom prst="rect">
-            <a:avLst>
-              <a:gd name="adj" fmla="val 9615"/>
-            </a:avLst>
-          </a:prstGeom>
-          <a:solidFill>
-            <a:srgbClr val="FFFFFF"/>
-          </a:solidFill>
-          <a:ln w="12700">
-            <a:solidFill>
-              <a:srgbClr val="0D9488"/>
-            </a:solidFill>
-            <a:prstDash val="solid"/>
-          </a:ln>
-        </p:spPr>
-      </p:sp>
-      <p:sp>
-        <p:nvSpPr>
-          <p:cNvPr id="32" name="Text 30"/>
-          <p:cNvSpPr/>
-          <p:nvPr/>
-        </p:nvSpPr>
-        <p:spPr>
-          <a:xfrm>
-            <a:off x="6428232" y="3364992"/>
-            <a:ext cx="1645920" cy="475488"/>
-          </a:xfrm>
-          <a:prstGeom prst="rect">
-            <a:avLst/>
-          </a:prstGeom>
-          <a:noFill/>
-          <a:ln/>
-        </p:spPr>
-        <p:txBody>
-          <a:bodyPr wrap="square" lIns="0" tIns="0" rIns="0" bIns="0" rtlCol="0" anchor="ctr"/>
-          <a:lstStyle/>
-          <a:p>
-            <a:pPr algn="ctr" indent="0" marL="0">
-              <a:buNone/>
-            </a:pPr>
-            <a:r>
-              <a:rPr lang="en-US" sz="1400" b="1" dirty="0">
-                <a:solidFill>
-                  <a:srgbClr val="0D9488"/>
-                </a:solidFill>
-                <a:latin typeface="Trebuchet MS" pitchFamily="34" charset="0"/>
-                <a:ea typeface="Trebuchet MS" pitchFamily="34" charset="-122"/>
-                <a:cs typeface="Trebuchet MS" pitchFamily="34" charset="-120"/>
-              </a:rPr>
-              <a:t>ful</a:t>
-            </a:r>
-            <a:endParaRPr lang="en-US" sz="1400" dirty="0"/>
-          </a:p>
-        </p:txBody>
-      </p:sp>
-      <p:sp>
-        <p:nvSpPr>
-          <p:cNvPr id="33" name="Shape 31"/>
-          <p:cNvSpPr/>
-          <p:nvPr/>
-        </p:nvSpPr>
-        <p:spPr>
-          <a:xfrm>
-            <a:off x="365760" y="4096512"/>
-            <a:ext cx="1371600" cy="804672"/>
+              <a:t>Phonemes</a:t>
+            </a:r>
+            <a:endParaRPr lang="en-US" sz="1100" dirty="0"/>
+          </a:p>
+        </p:txBody>
+      </p:sp>
+      <p:sp>
+        <p:nvSpPr>
+          <p:cNvPr id="32" name="Shape 30"/>
+          <p:cNvSpPr/>
+          <p:nvPr/>
+        </p:nvSpPr>
+        <p:spPr>
+          <a:xfrm>
+            <a:off x="1874520" y="4096512"/>
+            <a:ext cx="6903720" cy="804672"/>
           </a:xfrm>
           <a:prstGeom prst="rect">
             <a:avLst>
@@ -30156,85 +30129,19 @@
             </a:avLst>
           </a:prstGeom>
           <a:solidFill>
-            <a:srgbClr val="E2E8F0"/>
+            <a:srgbClr val="F8FAFC"/>
           </a:solidFill>
           <a:ln w="12700">
             <a:solidFill>
               <a:srgbClr val="E2E8F0"/>
             </a:solidFill>
-            <a:prstDash val="solid"/>
-          </a:ln>
-        </p:spPr>
-      </p:sp>
-      <p:sp>
-        <p:nvSpPr>
-          <p:cNvPr id="34" name="Text 32"/>
-          <p:cNvSpPr/>
-          <p:nvPr/>
-        </p:nvSpPr>
-        <p:spPr>
-          <a:xfrm>
-            <a:off x="365760" y="4096512"/>
-            <a:ext cx="1371600" cy="804672"/>
-          </a:xfrm>
-          <a:prstGeom prst="rect">
-            <a:avLst/>
-          </a:prstGeom>
-          <a:noFill/>
-          <a:ln/>
-        </p:spPr>
-        <p:txBody>
-          <a:bodyPr wrap="square" lIns="0" tIns="0" rIns="0" bIns="0" rtlCol="0" anchor="ctr"/>
-          <a:lstStyle/>
-          <a:p>
-            <a:pPr algn="ctr" indent="0" marL="0">
-              <a:buNone/>
-            </a:pPr>
-            <a:r>
-              <a:rPr lang="en-US" sz="1100" b="1" dirty="0">
-                <a:solidFill>
-                  <a:srgbClr val="475569"/>
-                </a:solidFill>
-                <a:latin typeface="Trebuchet MS" pitchFamily="34" charset="0"/>
-                <a:ea typeface="Trebuchet MS" pitchFamily="34" charset="-122"/>
-                <a:cs typeface="Trebuchet MS" pitchFamily="34" charset="-120"/>
-              </a:rPr>
-              <a:t>Phonemes</a:t>
-            </a:r>
-            <a:endParaRPr lang="en-US" sz="1100" dirty="0"/>
-          </a:p>
-        </p:txBody>
-      </p:sp>
-      <p:sp>
-        <p:nvSpPr>
-          <p:cNvPr id="35" name="Shape 33"/>
-          <p:cNvSpPr/>
-          <p:nvPr/>
-        </p:nvSpPr>
-        <p:spPr>
-          <a:xfrm>
-            <a:off x="1874520" y="4096512"/>
-            <a:ext cx="6903720" cy="804672"/>
-          </a:xfrm>
-          <a:prstGeom prst="rect">
-            <a:avLst>
-              <a:gd name="adj" fmla="val 6818"/>
-            </a:avLst>
-          </a:prstGeom>
-          <a:solidFill>
-            <a:srgbClr val="F8FAFC"/>
-          </a:solidFill>
-          <a:ln w="12700">
-            <a:solidFill>
-              <a:srgbClr val="E2E8F0"/>
-            </a:solidFill>
             <a:prstDash val="dash"/>
           </a:ln>
         </p:spPr>
       </p:sp>
       <p:sp>
         <p:nvSpPr>
-          <p:cNvPr id="36" name="Text 34"/>
+          <p:cNvPr id="33" name="Text 31"/>
           <p:cNvSpPr/>
           <p:nvPr/>
         </p:nvSpPr>
@@ -30696,7 +30603,7 @@
                 <a:ea typeface="Trebuchet MS" pitchFamily="34" charset="-122"/>
                 <a:cs typeface="Trebuchet MS" pitchFamily="34" charset="-120"/>
               </a:rPr>
-              <a:t>colourful</a:t>
+              <a:t>helpful</a:t>
             </a:r>
             <a:endParaRPr lang="en-US" sz="2800" dirty="0"/>
           </a:p>
@@ -30835,7 +30742,7 @@
                 <a:ea typeface="Trebuchet MS" pitchFamily="34" charset="-122"/>
                 <a:cs typeface="Trebuchet MS" pitchFamily="34" charset="-120"/>
               </a:rPr>
-              <a:t>colour</a:t>
+              <a:t>help</a:t>
             </a:r>
             <a:endParaRPr lang="en-US" sz="1300" dirty="0"/>
           </a:p>
@@ -30874,7 +30781,7 @@
                 <a:ea typeface="Calibri" pitchFamily="34" charset="-122"/>
                 <a:cs typeface="Calibri" pitchFamily="34" charset="-120"/>
               </a:rPr>
-              <a:t>hue or shade seen by the eye</a:t>
+              <a:t>to assist or support someone</a:t>
             </a:r>
             <a:endParaRPr lang="en-US" sz="850" dirty="0"/>
           </a:p>
@@ -30986,7 +30893,7 @@
                 <a:ea typeface="Calibri" pitchFamily="34" charset="-122"/>
                 <a:cs typeface="Calibri" pitchFamily="34" charset="-120"/>
               </a:rPr>
-              <a:t>full of</a:t>
+              <a:t>full of, having quality</a:t>
             </a:r>
             <a:endParaRPr lang="en-US" sz="850" dirty="0"/>
           </a:p>
@@ -31093,7 +31000,7 @@
         </p:nvSpPr>
         <p:spPr>
           <a:xfrm>
-            <a:off x="2313432" y="3364992"/>
+            <a:off x="2999232" y="3364992"/>
             <a:ext cx="1645920" cy="475488"/>
           </a:xfrm>
           <a:prstGeom prst="rect">
@@ -31120,7 +31027,7 @@
         </p:nvSpPr>
         <p:spPr>
           <a:xfrm>
-            <a:off x="2313432" y="3364992"/>
+            <a:off x="2999232" y="3364992"/>
             <a:ext cx="1645920" cy="475488"/>
           </a:xfrm>
           <a:prstGeom prst="rect">
@@ -31145,7 +31052,7 @@
                 <a:ea typeface="Trebuchet MS" pitchFamily="34" charset="-122"/>
                 <a:cs typeface="Trebuchet MS" pitchFamily="34" charset="-120"/>
               </a:rPr>
-              <a:t>col</a:t>
+              <a:t>help</a:t>
             </a:r>
             <a:endParaRPr lang="en-US" sz="1400" dirty="0"/>
           </a:p>
@@ -31159,8 +31066,8 @@
         </p:nvSpPr>
         <p:spPr>
           <a:xfrm>
-            <a:off x="3959352" y="3364992"/>
-            <a:ext cx="411480" cy="475488"/>
+            <a:off x="4645152" y="3364992"/>
+            <a:ext cx="1097280" cy="475488"/>
           </a:xfrm>
           <a:prstGeom prst="rect">
             <a:avLst/>
@@ -31198,7 +31105,7 @@
         </p:nvSpPr>
         <p:spPr>
           <a:xfrm>
-            <a:off x="4370832" y="3364992"/>
+            <a:off x="5742432" y="3364992"/>
             <a:ext cx="1645920" cy="475488"/>
           </a:xfrm>
           <a:prstGeom prst="rect">
@@ -31225,7 +31132,7 @@
         </p:nvSpPr>
         <p:spPr>
           <a:xfrm>
-            <a:off x="4370832" y="3364992"/>
+            <a:off x="5742432" y="3364992"/>
             <a:ext cx="1645920" cy="475488"/>
           </a:xfrm>
           <a:prstGeom prst="rect">
@@ -31250,7 +31157,7 @@
                 <a:ea typeface="Trebuchet MS" pitchFamily="34" charset="-122"/>
                 <a:cs typeface="Trebuchet MS" pitchFamily="34" charset="-120"/>
               </a:rPr>
-              <a:t>our</a:t>
+              <a:t>ful</a:t>
             </a:r>
             <a:endParaRPr lang="en-US" sz="1400" dirty="0"/>
           </a:p>
@@ -31258,14 +31165,41 @@
       </p:sp>
       <p:sp>
         <p:nvSpPr>
-          <p:cNvPr id="30" name="Text 28"/>
-          <p:cNvSpPr/>
-          <p:nvPr/>
-        </p:nvSpPr>
-        <p:spPr>
-          <a:xfrm>
-            <a:off x="6016752" y="3364992"/>
-            <a:ext cx="411480" cy="475488"/>
+          <p:cNvPr id="30" name="Shape 28"/>
+          <p:cNvSpPr/>
+          <p:nvPr/>
+        </p:nvSpPr>
+        <p:spPr>
+          <a:xfrm>
+            <a:off x="365760" y="4096512"/>
+            <a:ext cx="1371600" cy="804672"/>
+          </a:xfrm>
+          <a:prstGeom prst="rect">
+            <a:avLst>
+              <a:gd name="adj" fmla="val 6818"/>
+            </a:avLst>
+          </a:prstGeom>
+          <a:solidFill>
+            <a:srgbClr val="E2E8F0"/>
+          </a:solidFill>
+          <a:ln w="12700">
+            <a:solidFill>
+              <a:srgbClr val="E2E8F0"/>
+            </a:solidFill>
+            <a:prstDash val="solid"/>
+          </a:ln>
+        </p:spPr>
+      </p:sp>
+      <p:sp>
+        <p:nvSpPr>
+          <p:cNvPr id="31" name="Text 29"/>
+          <p:cNvSpPr/>
+          <p:nvPr/>
+        </p:nvSpPr>
+        <p:spPr>
+          <a:xfrm>
+            <a:off x="365760" y="4096512"/>
+            <a:ext cx="1371600" cy="804672"/>
           </a:xfrm>
           <a:prstGeom prst="rect">
             <a:avLst/>
@@ -31281,57 +31215,84 @@
               <a:buNone/>
             </a:pPr>
             <a:r>
-              <a:rPr lang="en-US" sz="1600" b="1" dirty="0">
-                <a:solidFill>
-                  <a:srgbClr val="0D9488"/>
+              <a:rPr lang="en-US" sz="1100" b="1" dirty="0">
+                <a:solidFill>
+                  <a:srgbClr val="475569"/>
                 </a:solidFill>
                 <a:latin typeface="Trebuchet MS" pitchFamily="34" charset="0"/>
                 <a:ea typeface="Trebuchet MS" pitchFamily="34" charset="-122"/>
                 <a:cs typeface="Trebuchet MS" pitchFamily="34" charset="-120"/>
               </a:rPr>
-              <a:t>·</a:t>
-            </a:r>
-            <a:endParaRPr lang="en-US" sz="1600" dirty="0"/>
-          </a:p>
-        </p:txBody>
-      </p:sp>
-      <p:sp>
-        <p:nvSpPr>
-          <p:cNvPr id="31" name="Shape 29"/>
-          <p:cNvSpPr/>
-          <p:nvPr/>
-        </p:nvSpPr>
-        <p:spPr>
-          <a:xfrm>
-            <a:off x="6428232" y="3364992"/>
-            <a:ext cx="1645920" cy="475488"/>
+              <a:t>Phonemes</a:t>
+            </a:r>
+            <a:endParaRPr lang="en-US" sz="1100" dirty="0"/>
+          </a:p>
+        </p:txBody>
+      </p:sp>
+      <p:sp>
+        <p:nvSpPr>
+          <p:cNvPr id="32" name="Shape 30"/>
+          <p:cNvSpPr/>
+          <p:nvPr/>
+        </p:nvSpPr>
+        <p:spPr>
+          <a:xfrm>
+            <a:off x="1874520" y="4096512"/>
+            <a:ext cx="6903720" cy="658368"/>
           </a:xfrm>
           <a:prstGeom prst="rect">
             <a:avLst>
-              <a:gd name="adj" fmla="val 9615"/>
+              <a:gd name="adj" fmla="val 8333"/>
             </a:avLst>
           </a:prstGeom>
           <a:solidFill>
+            <a:srgbClr val="FCE7F3"/>
+          </a:solidFill>
+          <a:ln w="12700">
+            <a:solidFill>
+              <a:srgbClr val="DB2777"/>
+            </a:solidFill>
+            <a:prstDash val="solid"/>
+          </a:ln>
+        </p:spPr>
+      </p:sp>
+      <p:sp>
+        <p:nvSpPr>
+          <p:cNvPr id="33" name="Shape 31"/>
+          <p:cNvSpPr/>
+          <p:nvPr/>
+        </p:nvSpPr>
+        <p:spPr>
+          <a:xfrm>
+            <a:off x="2124837" y="4169664"/>
+            <a:ext cx="685800" cy="475488"/>
+          </a:xfrm>
+          <a:prstGeom prst="rect">
+            <a:avLst>
+              <a:gd name="adj" fmla="val 7692"/>
+            </a:avLst>
+          </a:prstGeom>
+          <a:solidFill>
             <a:srgbClr val="FFFFFF"/>
           </a:solidFill>
           <a:ln w="12700">
             <a:solidFill>
-              <a:srgbClr val="0D9488"/>
-            </a:solidFill>
-            <a:prstDash val="solid"/>
-          </a:ln>
-        </p:spPr>
-      </p:sp>
-      <p:sp>
-        <p:nvSpPr>
-          <p:cNvPr id="32" name="Text 30"/>
-          <p:cNvSpPr/>
-          <p:nvPr/>
-        </p:nvSpPr>
-        <p:spPr>
-          <a:xfrm>
-            <a:off x="6428232" y="3364992"/>
-            <a:ext cx="1645920" cy="475488"/>
+              <a:srgbClr val="DB2777"/>
+            </a:solidFill>
+            <a:prstDash val="solid"/>
+          </a:ln>
+        </p:spPr>
+      </p:sp>
+      <p:sp>
+        <p:nvSpPr>
+          <p:cNvPr id="34" name="Text 32"/>
+          <p:cNvSpPr/>
+          <p:nvPr/>
+        </p:nvSpPr>
+        <p:spPr>
+          <a:xfrm>
+            <a:off x="2124837" y="4169664"/>
+            <a:ext cx="685800" cy="475488"/>
           </a:xfrm>
           <a:prstGeom prst="rect">
             <a:avLst/>
@@ -31347,57 +31308,57 @@
               <a:buNone/>
             </a:pPr>
             <a:r>
-              <a:rPr lang="en-US" sz="1400" b="1" dirty="0">
-                <a:solidFill>
-                  <a:srgbClr val="0D9488"/>
+              <a:rPr lang="en-US" sz="900" b="1" dirty="0">
+                <a:solidFill>
+                  <a:srgbClr val="9D174D"/>
                 </a:solidFill>
                 <a:latin typeface="Trebuchet MS" pitchFamily="34" charset="0"/>
                 <a:ea typeface="Trebuchet MS" pitchFamily="34" charset="-122"/>
                 <a:cs typeface="Trebuchet MS" pitchFamily="34" charset="-120"/>
               </a:rPr>
-              <a:t>ful</a:t>
-            </a:r>
-            <a:endParaRPr lang="en-US" sz="1400" dirty="0"/>
-          </a:p>
-        </p:txBody>
-      </p:sp>
-      <p:sp>
-        <p:nvSpPr>
-          <p:cNvPr id="33" name="Shape 31"/>
-          <p:cNvSpPr/>
-          <p:nvPr/>
-        </p:nvSpPr>
-        <p:spPr>
-          <a:xfrm>
-            <a:off x="365760" y="4096512"/>
-            <a:ext cx="1371600" cy="804672"/>
+              <a:t>h</a:t>
+            </a:r>
+            <a:endParaRPr lang="en-US" sz="900" dirty="0"/>
+          </a:p>
+        </p:txBody>
+      </p:sp>
+      <p:sp>
+        <p:nvSpPr>
+          <p:cNvPr id="35" name="Shape 33"/>
+          <p:cNvSpPr/>
+          <p:nvPr/>
+        </p:nvSpPr>
+        <p:spPr>
+          <a:xfrm>
+            <a:off x="3033522" y="4169664"/>
+            <a:ext cx="685800" cy="475488"/>
           </a:xfrm>
           <a:prstGeom prst="rect">
             <a:avLst>
-              <a:gd name="adj" fmla="val 6818"/>
+              <a:gd name="adj" fmla="val 7692"/>
             </a:avLst>
           </a:prstGeom>
           <a:solidFill>
-            <a:srgbClr val="E2E8F0"/>
-          </a:solidFill>
-          <a:ln w="12700">
-            <a:solidFill>
-              <a:srgbClr val="E2E8F0"/>
-            </a:solidFill>
-            <a:prstDash val="solid"/>
-          </a:ln>
-        </p:spPr>
-      </p:sp>
-      <p:sp>
-        <p:nvSpPr>
-          <p:cNvPr id="34" name="Text 32"/>
-          <p:cNvSpPr/>
-          <p:nvPr/>
-        </p:nvSpPr>
-        <p:spPr>
-          <a:xfrm>
-            <a:off x="365760" y="4096512"/>
-            <a:ext cx="1371600" cy="804672"/>
+            <a:srgbClr val="FFFFFF"/>
+          </a:solidFill>
+          <a:ln w="12700">
+            <a:solidFill>
+              <a:srgbClr val="DB2777"/>
+            </a:solidFill>
+            <a:prstDash val="solid"/>
+          </a:ln>
+        </p:spPr>
+      </p:sp>
+      <p:sp>
+        <p:nvSpPr>
+          <p:cNvPr id="36" name="Text 34"/>
+          <p:cNvSpPr/>
+          <p:nvPr/>
+        </p:nvSpPr>
+        <p:spPr>
+          <a:xfrm>
+            <a:off x="3033522" y="4169664"/>
+            <a:ext cx="685800" cy="475488"/>
           </a:xfrm>
           <a:prstGeom prst="rect">
             <a:avLst/>
@@ -31413,38 +31374,38 @@
               <a:buNone/>
             </a:pPr>
             <a:r>
-              <a:rPr lang="en-US" sz="1100" b="1" dirty="0">
-                <a:solidFill>
-                  <a:srgbClr val="475569"/>
+              <a:rPr lang="en-US" sz="900" b="1" dirty="0">
+                <a:solidFill>
+                  <a:srgbClr val="9D174D"/>
                 </a:solidFill>
                 <a:latin typeface="Trebuchet MS" pitchFamily="34" charset="0"/>
                 <a:ea typeface="Trebuchet MS" pitchFamily="34" charset="-122"/>
                 <a:cs typeface="Trebuchet MS" pitchFamily="34" charset="-120"/>
               </a:rPr>
-              <a:t>Phonemes</a:t>
-            </a:r>
-            <a:endParaRPr lang="en-US" sz="1100" dirty="0"/>
-          </a:p>
-        </p:txBody>
-      </p:sp>
-      <p:sp>
-        <p:nvSpPr>
-          <p:cNvPr id="35" name="Shape 33"/>
-          <p:cNvSpPr/>
-          <p:nvPr/>
-        </p:nvSpPr>
-        <p:spPr>
-          <a:xfrm>
-            <a:off x="1874520" y="4096512"/>
-            <a:ext cx="6903720" cy="804672"/>
+              <a:t>e</a:t>
+            </a:r>
+            <a:endParaRPr lang="en-US" sz="900" dirty="0"/>
+          </a:p>
+        </p:txBody>
+      </p:sp>
+      <p:sp>
+        <p:nvSpPr>
+          <p:cNvPr id="37" name="Shape 35"/>
+          <p:cNvSpPr/>
+          <p:nvPr/>
+        </p:nvSpPr>
+        <p:spPr>
+          <a:xfrm>
+            <a:off x="3942207" y="4169664"/>
+            <a:ext cx="685800" cy="475488"/>
           </a:xfrm>
           <a:prstGeom prst="rect">
             <a:avLst>
-              <a:gd name="adj" fmla="val 6818"/>
+              <a:gd name="adj" fmla="val 7692"/>
             </a:avLst>
           </a:prstGeom>
           <a:solidFill>
-            <a:srgbClr val="FCE7F3"/>
+            <a:srgbClr val="FFFFFF"/>
           </a:solidFill>
           <a:ln w="12700">
             <a:solidFill>
@@ -31456,41 +31417,14 @@
       </p:sp>
       <p:sp>
         <p:nvSpPr>
-          <p:cNvPr id="36" name="Shape 34"/>
-          <p:cNvSpPr/>
-          <p:nvPr/>
-        </p:nvSpPr>
-        <p:spPr>
-          <a:xfrm>
-            <a:off x="2023872" y="4169664"/>
-            <a:ext cx="685800" cy="384048"/>
-          </a:xfrm>
-          <a:prstGeom prst="rect">
-            <a:avLst>
-              <a:gd name="adj" fmla="val 9524"/>
-            </a:avLst>
-          </a:prstGeom>
-          <a:solidFill>
-            <a:srgbClr val="FFFFFF"/>
-          </a:solidFill>
-          <a:ln w="12700">
-            <a:solidFill>
-              <a:srgbClr val="DB2777"/>
-            </a:solidFill>
-            <a:prstDash val="solid"/>
-          </a:ln>
-        </p:spPr>
-      </p:sp>
-      <p:sp>
-        <p:nvSpPr>
-          <p:cNvPr id="37" name="Text 35"/>
-          <p:cNvSpPr/>
-          <p:nvPr/>
-        </p:nvSpPr>
-        <p:spPr>
-          <a:xfrm>
-            <a:off x="2023872" y="4169664"/>
-            <a:ext cx="685800" cy="384048"/>
+          <p:cNvPr id="38" name="Text 36"/>
+          <p:cNvSpPr/>
+          <p:nvPr/>
+        </p:nvSpPr>
+        <p:spPr>
+          <a:xfrm>
+            <a:off x="3942207" y="4169664"/>
+            <a:ext cx="685800" cy="475488"/>
           </a:xfrm>
           <a:prstGeom prst="rect">
             <a:avLst/>
@@ -31514,7 +31448,7 @@
                 <a:ea typeface="Trebuchet MS" pitchFamily="34" charset="-122"/>
                 <a:cs typeface="Trebuchet MS" pitchFamily="34" charset="-120"/>
               </a:rPr>
-              <a:t>c</a:t>
+              <a:t>l</a:t>
             </a:r>
             <a:endParaRPr lang="en-US" sz="900" dirty="0"/>
           </a:p>
@@ -31522,57 +31456,18 @@
       </p:sp>
       <p:sp>
         <p:nvSpPr>
-          <p:cNvPr id="38" name="Text 36"/>
-          <p:cNvSpPr/>
-          <p:nvPr/>
-        </p:nvSpPr>
-        <p:spPr>
-          <a:xfrm>
-            <a:off x="2023872" y="4572000"/>
-            <a:ext cx="685800" cy="219456"/>
-          </a:xfrm>
-          <a:prstGeom prst="rect">
-            <a:avLst/>
-          </a:prstGeom>
-          <a:noFill/>
-          <a:ln/>
-        </p:spPr>
-        <p:txBody>
-          <a:bodyPr wrap="square" lIns="0" tIns="0" rIns="0" bIns="0" rtlCol="0" anchor="t"/>
-          <a:lstStyle/>
-          <a:p>
-            <a:pPr algn="ctr" indent="0" marL="0">
-              <a:buNone/>
-            </a:pPr>
-            <a:r>
-              <a:rPr lang="en-US" sz="750" i="1" dirty="0">
-                <a:solidFill>
-                  <a:srgbClr val="94A3B8"/>
-                </a:solidFill>
-                <a:latin typeface="Calibri" pitchFamily="34" charset="0"/>
-                <a:ea typeface="Calibri" pitchFamily="34" charset="-122"/>
-                <a:cs typeface="Calibri" pitchFamily="34" charset="-120"/>
-              </a:rPr>
-              <a:t>/k/</a:t>
-            </a:r>
-            <a:endParaRPr lang="en-US" sz="750" dirty="0"/>
-          </a:p>
-        </p:txBody>
-      </p:sp>
-      <p:sp>
-        <p:nvSpPr>
           <p:cNvPr id="39" name="Shape 37"/>
           <p:cNvSpPr/>
           <p:nvPr/>
         </p:nvSpPr>
         <p:spPr>
           <a:xfrm>
-            <a:off x="2831592" y="4169664"/>
-            <a:ext cx="685800" cy="384048"/>
+            <a:off x="4850892" y="4169664"/>
+            <a:ext cx="685800" cy="475488"/>
           </a:xfrm>
           <a:prstGeom prst="rect">
             <a:avLst>
-              <a:gd name="adj" fmla="val 9524"/>
+              <a:gd name="adj" fmla="val 7692"/>
             </a:avLst>
           </a:prstGeom>
           <a:solidFill>
@@ -31594,8 +31489,8 @@
         </p:nvSpPr>
         <p:spPr>
           <a:xfrm>
-            <a:off x="2831592" y="4169664"/>
-            <a:ext cx="685800" cy="384048"/>
+            <a:off x="4850892" y="4169664"/>
+            <a:ext cx="685800" cy="475488"/>
           </a:xfrm>
           <a:prstGeom prst="rect">
             <a:avLst/>
@@ -31619,7 +31514,7 @@
                 <a:ea typeface="Trebuchet MS" pitchFamily="34" charset="-122"/>
                 <a:cs typeface="Trebuchet MS" pitchFamily="34" charset="-120"/>
               </a:rPr>
-              <a:t>o</a:t>
+              <a:t>p</a:t>
             </a:r>
             <a:endParaRPr lang="en-US" sz="900" dirty="0"/>
           </a:p>
@@ -31633,12 +31528,12 @@
         </p:nvSpPr>
         <p:spPr>
           <a:xfrm>
-            <a:off x="3639312" y="4169664"/>
-            <a:ext cx="685800" cy="384048"/>
+            <a:off x="5759577" y="4169664"/>
+            <a:ext cx="685800" cy="475488"/>
           </a:xfrm>
           <a:prstGeom prst="rect">
             <a:avLst>
-              <a:gd name="adj" fmla="val 9524"/>
+              <a:gd name="adj" fmla="val 7692"/>
             </a:avLst>
           </a:prstGeom>
           <a:solidFill>
@@ -31660,8 +31555,8 @@
         </p:nvSpPr>
         <p:spPr>
           <a:xfrm>
-            <a:off x="3639312" y="4169664"/>
-            <a:ext cx="685800" cy="384048"/>
+            <a:off x="5759577" y="4169664"/>
+            <a:ext cx="685800" cy="475488"/>
           </a:xfrm>
           <a:prstGeom prst="rect">
             <a:avLst/>
@@ -31685,7 +31580,7 @@
                 <a:ea typeface="Trebuchet MS" pitchFamily="34" charset="-122"/>
                 <a:cs typeface="Trebuchet MS" pitchFamily="34" charset="-120"/>
               </a:rPr>
-              <a:t>l</a:t>
+              <a:t>f</a:t>
             </a:r>
             <a:endParaRPr lang="en-US" sz="900" dirty="0"/>
           </a:p>
@@ -31699,12 +31594,12 @@
         </p:nvSpPr>
         <p:spPr>
           <a:xfrm>
-            <a:off x="4447032" y="4169664"/>
-            <a:ext cx="685800" cy="384048"/>
+            <a:off x="6668262" y="4169664"/>
+            <a:ext cx="685800" cy="475488"/>
           </a:xfrm>
           <a:prstGeom prst="rect">
             <a:avLst>
-              <a:gd name="adj" fmla="val 9524"/>
+              <a:gd name="adj" fmla="val 7692"/>
             </a:avLst>
           </a:prstGeom>
           <a:solidFill>
@@ -31726,8 +31621,8 @@
         </p:nvSpPr>
         <p:spPr>
           <a:xfrm>
-            <a:off x="4447032" y="4169664"/>
-            <a:ext cx="685800" cy="384048"/>
+            <a:off x="6668262" y="4169664"/>
+            <a:ext cx="685800" cy="475488"/>
           </a:xfrm>
           <a:prstGeom prst="rect">
             <a:avLst/>
@@ -31751,7 +31646,7 @@
                 <a:ea typeface="Trebuchet MS" pitchFamily="34" charset="-122"/>
                 <a:cs typeface="Trebuchet MS" pitchFamily="34" charset="-120"/>
               </a:rPr>
-              <a:t>ou</a:t>
+              <a:t>u</a:t>
             </a:r>
             <a:endParaRPr lang="en-US" sz="900" dirty="0"/>
           </a:p>
@@ -31765,12 +31660,12 @@
         </p:nvSpPr>
         <p:spPr>
           <a:xfrm>
-            <a:off x="5254752" y="4169664"/>
-            <a:ext cx="685800" cy="384048"/>
+            <a:off x="7576947" y="4169664"/>
+            <a:ext cx="685800" cy="475488"/>
           </a:xfrm>
           <a:prstGeom prst="rect">
             <a:avLst>
-              <a:gd name="adj" fmla="val 9524"/>
+              <a:gd name="adj" fmla="val 7692"/>
             </a:avLst>
           </a:prstGeom>
           <a:solidFill>
@@ -31792,206 +31687,8 @@
         </p:nvSpPr>
         <p:spPr>
           <a:xfrm>
-            <a:off x="5254752" y="4169664"/>
-            <a:ext cx="685800" cy="384048"/>
-          </a:xfrm>
-          <a:prstGeom prst="rect">
-            <a:avLst/>
-          </a:prstGeom>
-          <a:noFill/>
-          <a:ln/>
-        </p:spPr>
-        <p:txBody>
-          <a:bodyPr wrap="square" lIns="0" tIns="0" rIns="0" bIns="0" rtlCol="0" anchor="ctr"/>
-          <a:lstStyle/>
-          <a:p>
-            <a:pPr algn="ctr" indent="0" marL="0">
-              <a:buNone/>
-            </a:pPr>
-            <a:r>
-              <a:rPr lang="en-US" sz="900" b="1" dirty="0">
-                <a:solidFill>
-                  <a:srgbClr val="9D174D"/>
-                </a:solidFill>
-                <a:latin typeface="Trebuchet MS" pitchFamily="34" charset="0"/>
-                <a:ea typeface="Trebuchet MS" pitchFamily="34" charset="-122"/>
-                <a:cs typeface="Trebuchet MS" pitchFamily="34" charset="-120"/>
-              </a:rPr>
-              <a:t>r</a:t>
-            </a:r>
-            <a:endParaRPr lang="en-US" sz="900" dirty="0"/>
-          </a:p>
-        </p:txBody>
-      </p:sp>
-      <p:sp>
-        <p:nvSpPr>
-          <p:cNvPr id="47" name="Shape 45"/>
-          <p:cNvSpPr/>
-          <p:nvPr/>
-        </p:nvSpPr>
-        <p:spPr>
-          <a:xfrm>
-            <a:off x="6062472" y="4169664"/>
-            <a:ext cx="685800" cy="384048"/>
-          </a:xfrm>
-          <a:prstGeom prst="rect">
-            <a:avLst>
-              <a:gd name="adj" fmla="val 9524"/>
-            </a:avLst>
-          </a:prstGeom>
-          <a:solidFill>
-            <a:srgbClr val="FFFFFF"/>
-          </a:solidFill>
-          <a:ln w="12700">
-            <a:solidFill>
-              <a:srgbClr val="DB2777"/>
-            </a:solidFill>
-            <a:prstDash val="solid"/>
-          </a:ln>
-        </p:spPr>
-      </p:sp>
-      <p:sp>
-        <p:nvSpPr>
-          <p:cNvPr id="48" name="Text 46"/>
-          <p:cNvSpPr/>
-          <p:nvPr/>
-        </p:nvSpPr>
-        <p:spPr>
-          <a:xfrm>
-            <a:off x="6062472" y="4169664"/>
-            <a:ext cx="685800" cy="384048"/>
-          </a:xfrm>
-          <a:prstGeom prst="rect">
-            <a:avLst/>
-          </a:prstGeom>
-          <a:noFill/>
-          <a:ln/>
-        </p:spPr>
-        <p:txBody>
-          <a:bodyPr wrap="square" lIns="0" tIns="0" rIns="0" bIns="0" rtlCol="0" anchor="ctr"/>
-          <a:lstStyle/>
-          <a:p>
-            <a:pPr algn="ctr" indent="0" marL="0">
-              <a:buNone/>
-            </a:pPr>
-            <a:r>
-              <a:rPr lang="en-US" sz="900" b="1" dirty="0">
-                <a:solidFill>
-                  <a:srgbClr val="9D174D"/>
-                </a:solidFill>
-                <a:latin typeface="Trebuchet MS" pitchFamily="34" charset="0"/>
-                <a:ea typeface="Trebuchet MS" pitchFamily="34" charset="-122"/>
-                <a:cs typeface="Trebuchet MS" pitchFamily="34" charset="-120"/>
-              </a:rPr>
-              <a:t>f</a:t>
-            </a:r>
-            <a:endParaRPr lang="en-US" sz="900" dirty="0"/>
-          </a:p>
-        </p:txBody>
-      </p:sp>
-      <p:sp>
-        <p:nvSpPr>
-          <p:cNvPr id="49" name="Shape 47"/>
-          <p:cNvSpPr/>
-          <p:nvPr/>
-        </p:nvSpPr>
-        <p:spPr>
-          <a:xfrm>
-            <a:off x="6870192" y="4169664"/>
-            <a:ext cx="685800" cy="384048"/>
-          </a:xfrm>
-          <a:prstGeom prst="rect">
-            <a:avLst>
-              <a:gd name="adj" fmla="val 9524"/>
-            </a:avLst>
-          </a:prstGeom>
-          <a:solidFill>
-            <a:srgbClr val="FFFFFF"/>
-          </a:solidFill>
-          <a:ln w="12700">
-            <a:solidFill>
-              <a:srgbClr val="DB2777"/>
-            </a:solidFill>
-            <a:prstDash val="solid"/>
-          </a:ln>
-        </p:spPr>
-      </p:sp>
-      <p:sp>
-        <p:nvSpPr>
-          <p:cNvPr id="50" name="Text 48"/>
-          <p:cNvSpPr/>
-          <p:nvPr/>
-        </p:nvSpPr>
-        <p:spPr>
-          <a:xfrm>
-            <a:off x="6870192" y="4169664"/>
-            <a:ext cx="685800" cy="384048"/>
-          </a:xfrm>
-          <a:prstGeom prst="rect">
-            <a:avLst/>
-          </a:prstGeom>
-          <a:noFill/>
-          <a:ln/>
-        </p:spPr>
-        <p:txBody>
-          <a:bodyPr wrap="square" lIns="0" tIns="0" rIns="0" bIns="0" rtlCol="0" anchor="ctr"/>
-          <a:lstStyle/>
-          <a:p>
-            <a:pPr algn="ctr" indent="0" marL="0">
-              <a:buNone/>
-            </a:pPr>
-            <a:r>
-              <a:rPr lang="en-US" sz="900" b="1" dirty="0">
-                <a:solidFill>
-                  <a:srgbClr val="9D174D"/>
-                </a:solidFill>
-                <a:latin typeface="Trebuchet MS" pitchFamily="34" charset="0"/>
-                <a:ea typeface="Trebuchet MS" pitchFamily="34" charset="-122"/>
-                <a:cs typeface="Trebuchet MS" pitchFamily="34" charset="-120"/>
-              </a:rPr>
-              <a:t>u</a:t>
-            </a:r>
-            <a:endParaRPr lang="en-US" sz="900" dirty="0"/>
-          </a:p>
-        </p:txBody>
-      </p:sp>
-      <p:sp>
-        <p:nvSpPr>
-          <p:cNvPr id="51" name="Shape 49"/>
-          <p:cNvSpPr/>
-          <p:nvPr/>
-        </p:nvSpPr>
-        <p:spPr>
-          <a:xfrm>
-            <a:off x="7677912" y="4169664"/>
-            <a:ext cx="685800" cy="384048"/>
-          </a:xfrm>
-          <a:prstGeom prst="rect">
-            <a:avLst>
-              <a:gd name="adj" fmla="val 9524"/>
-            </a:avLst>
-          </a:prstGeom>
-          <a:solidFill>
-            <a:srgbClr val="FFFFFF"/>
-          </a:solidFill>
-          <a:ln w="12700">
-            <a:solidFill>
-              <a:srgbClr val="DB2777"/>
-            </a:solidFill>
-            <a:prstDash val="solid"/>
-          </a:ln>
-        </p:spPr>
-      </p:sp>
-      <p:sp>
-        <p:nvSpPr>
-          <p:cNvPr id="52" name="Text 50"/>
-          <p:cNvSpPr/>
-          <p:nvPr/>
-        </p:nvSpPr>
-        <p:spPr>
-          <a:xfrm>
-            <a:off x="7677912" y="4169664"/>
-            <a:ext cx="685800" cy="384048"/>
+            <a:off x="7576947" y="4169664"/>
+            <a:ext cx="685800" cy="475488"/>
           </a:xfrm>
           <a:prstGeom prst="rect">
             <a:avLst/>
@@ -34275,7 +33972,7 @@
                 <a:ea typeface="Trebuchet MS" pitchFamily="34" charset="-122"/>
                 <a:cs typeface="Trebuchet MS" pitchFamily="34" charset="-120"/>
               </a:rPr>
-              <a:t>mis-</a:t>
+              <a:t>dis-</a:t>
             </a:r>
             <a:endParaRPr lang="en-US" sz="1300" dirty="0"/>
           </a:p>
@@ -34428,7 +34125,7 @@
                 <a:ea typeface="Trebuchet MS" pitchFamily="34" charset="-122"/>
                 <a:cs typeface="Trebuchet MS" pitchFamily="34" charset="-120"/>
               </a:rPr>
-              <a:t>dis-</a:t>
+              <a:t>mis-</a:t>
             </a:r>
             <a:endParaRPr lang="en-US" sz="1300" dirty="0"/>
           </a:p>
@@ -34622,7 +34319,7 @@
                 <a:ea typeface="Trebuchet MS" pitchFamily="34" charset="-122"/>
                 <a:cs typeface="Trebuchet MS" pitchFamily="34" charset="-120"/>
               </a:rPr>
-              <a:t>helpful</a:t>
+              <a:t>hopeful</a:t>
             </a:r>
             <a:endParaRPr lang="en-US" sz="1200" dirty="0"/>
           </a:p>
@@ -34688,7 +34385,7 @@
                 <a:ea typeface="Trebuchet MS" pitchFamily="34" charset="-122"/>
                 <a:cs typeface="Trebuchet MS" pitchFamily="34" charset="-120"/>
               </a:rPr>
-              <a:t>powerful</a:t>
+              <a:t>careful</a:t>
             </a:r>
             <a:endParaRPr lang="en-US" sz="1200" dirty="0"/>
           </a:p>
@@ -34754,7 +34451,7 @@
                 <a:ea typeface="Trebuchet MS" pitchFamily="34" charset="-122"/>
                 <a:cs typeface="Trebuchet MS" pitchFamily="34" charset="-120"/>
               </a:rPr>
-              <a:t>hopeful</a:t>
+              <a:t>powerful</a:t>
             </a:r>
             <a:endParaRPr lang="en-US" sz="1200" dirty="0"/>
           </a:p>
@@ -34820,7 +34517,7 @@
                 <a:ea typeface="Trebuchet MS" pitchFamily="34" charset="-122"/>
                 <a:cs typeface="Trebuchet MS" pitchFamily="34" charset="-120"/>
               </a:rPr>
-              <a:t>careful</a:t>
+              <a:t>playful</a:t>
             </a:r>
             <a:endParaRPr lang="en-US" sz="1200" dirty="0"/>
           </a:p>
@@ -34886,7 +34583,7 @@
                 <a:ea typeface="Trebuchet MS" pitchFamily="34" charset="-122"/>
                 <a:cs typeface="Trebuchet MS" pitchFamily="34" charset="-120"/>
               </a:rPr>
-              <a:t>playful</a:t>
+              <a:t>harmful</a:t>
             </a:r>
             <a:endParaRPr lang="en-US" sz="1200" dirty="0"/>
           </a:p>
@@ -34952,7 +34649,7 @@
                 <a:ea typeface="Trebuchet MS" pitchFamily="34" charset="-122"/>
                 <a:cs typeface="Trebuchet MS" pitchFamily="34" charset="-120"/>
               </a:rPr>
-              <a:t>thankful</a:t>
+              <a:t>grateful</a:t>
             </a:r>
             <a:endParaRPr lang="en-US" sz="1200" dirty="0"/>
           </a:p>
@@ -35018,7 +34715,7 @@
                 <a:ea typeface="Trebuchet MS" pitchFamily="34" charset="-122"/>
                 <a:cs typeface="Trebuchet MS" pitchFamily="34" charset="-120"/>
               </a:rPr>
-              <a:t>colourful</a:t>
+              <a:t>cheerful</a:t>
             </a:r>
             <a:endParaRPr lang="en-US" sz="1200" dirty="0"/>
           </a:p>
@@ -35704,7 +35401,7 @@
                 <a:ea typeface="Calibri" pitchFamily="34" charset="-122"/>
                 <a:cs typeface="Calibri" pitchFamily="34" charset="-120"/>
               </a:rPr>
-              <a:t>The core part of a word carrying its basic meaning. In 'helpful', the root is the part before the suffix '-ful'.</a:t>
+              <a:t>The core part of a word carrying its basic meaning. In 'hopeful', the root is the part before the suffix '-ful'.</a:t>
             </a:r>
             <a:endParaRPr lang="en-US" sz="1350" dirty="0"/>
           </a:p>
@@ -35868,7 +35565,7 @@
                 <a:ea typeface="Calibri" pitchFamily="34" charset="-122"/>
                 <a:cs typeface="Calibri" pitchFamily="34" charset="-120"/>
               </a:rPr>
-              <a:t>A meaningful word part added to the beginning of a root to change its meaning. E.g. 'un-' in 'powerful' means 'not'.</a:t>
+              <a:t>A meaningful word part added to the beginning of a root to change its meaning. E.g. 'un-' in 'careful' means 'not'.</a:t>
             </a:r>
             <a:endParaRPr lang="en-US" sz="1350" dirty="0"/>
           </a:p>
@@ -36272,7 +35969,7 @@
                 <a:ea typeface="Calibri" pitchFamily="34" charset="-122"/>
                 <a:cs typeface="Calibri" pitchFamily="34" charset="-120"/>
               </a:rPr>
-              <a:t>1.  The suffix '-ful' can turn a noun or verb into an adjective.</a:t>
+              <a:t>1.  The suffix '-ful' means 'without' or 'lacking'.</a:t>
             </a:r>
             <a:endParaRPr lang="en-US" sz="1300" dirty="0"/>
           </a:p>
@@ -36295,11 +35992,11 @@
             </a:avLst>
           </a:prstGeom>
           <a:solidFill>
-            <a:srgbClr val="DCFCE7"/>
-          </a:solidFill>
-          <a:ln w="12700">
-            <a:solidFill>
-              <a:srgbClr val="16A34A"/>
+            <a:srgbClr val="FEE2E2"/>
+          </a:solidFill>
+          <a:ln w="12700">
+            <a:solidFill>
+              <a:srgbClr val="DC2626"/>
             </a:solidFill>
             <a:prstDash val="solid"/>
           </a:ln>
@@ -36332,13 +36029,13 @@
             <a:r>
               <a:rPr lang="en-US" sz="1100" b="1" dirty="0">
                 <a:solidFill>
-                  <a:srgbClr val="16A34A"/>
+                  <a:srgbClr val="DC2626"/>
                 </a:solidFill>
                 <a:latin typeface="Trebuchet MS" pitchFamily="34" charset="0"/>
                 <a:ea typeface="Trebuchet MS" pitchFamily="34" charset="-122"/>
                 <a:cs typeface="Trebuchet MS" pitchFamily="34" charset="-120"/>
               </a:rPr>
-              <a:t>TRUE</a:t>
+              <a:t>FALSE</a:t>
             </a:r>
             <a:endParaRPr lang="en-US" sz="1100" dirty="0"/>
           </a:p>
@@ -36411,7 +36108,7 @@
                 <a:ea typeface="Calibri" pitchFamily="34" charset="-122"/>
                 <a:cs typeface="Calibri" pitchFamily="34" charset="-120"/>
               </a:rPr>
-              <a:t>2.  The suffix '-ful' means 'without' or 'not having'.</a:t>
+              <a:t>2.  The suffix '-ful' can turn a noun or verb into an adjective.</a:t>
             </a:r>
             <a:endParaRPr lang="en-US" sz="1300" dirty="0"/>
           </a:p>
@@ -36434,11 +36131,11 @@
             </a:avLst>
           </a:prstGeom>
           <a:solidFill>
-            <a:srgbClr val="FEE2E2"/>
-          </a:solidFill>
-          <a:ln w="12700">
-            <a:solidFill>
-              <a:srgbClr val="DC2626"/>
+            <a:srgbClr val="DCFCE7"/>
+          </a:solidFill>
+          <a:ln w="12700">
+            <a:solidFill>
+              <a:srgbClr val="16A34A"/>
             </a:solidFill>
             <a:prstDash val="solid"/>
           </a:ln>
@@ -36471,13 +36168,13 @@
             <a:r>
               <a:rPr lang="en-US" sz="1100" b="1" dirty="0">
                 <a:solidFill>
-                  <a:srgbClr val="DC2626"/>
+                  <a:srgbClr val="16A34A"/>
                 </a:solidFill>
                 <a:latin typeface="Trebuchet MS" pitchFamily="34" charset="0"/>
                 <a:ea typeface="Trebuchet MS" pitchFamily="34" charset="-122"/>
                 <a:cs typeface="Trebuchet MS" pitchFamily="34" charset="-120"/>
               </a:rPr>
-              <a:t>FALSE</a:t>
+              <a:t>TRUE</a:t>
             </a:r>
             <a:endParaRPr lang="en-US" sz="1100" dirty="0"/>
           </a:p>
@@ -36550,7 +36247,7 @@
                 <a:ea typeface="Calibri" pitchFamily="34" charset="-122"/>
                 <a:cs typeface="Calibri" pitchFamily="34" charset="-120"/>
               </a:rPr>
-              <a:t>3.  Adding '-ful' to 'hope' makes the word 'hopeful', meaning full of hope.</a:t>
+              <a:t>3.  The suffix '-ful' always means the thing is completely full, like a cup.</a:t>
             </a:r>
             <a:endParaRPr lang="en-US" sz="1300" dirty="0"/>
           </a:p>
@@ -36573,11 +36270,11 @@
             </a:avLst>
           </a:prstGeom>
           <a:solidFill>
-            <a:srgbClr val="DCFCE7"/>
-          </a:solidFill>
-          <a:ln w="12700">
-            <a:solidFill>
-              <a:srgbClr val="16A34A"/>
+            <a:srgbClr val="FEE2E2"/>
+          </a:solidFill>
+          <a:ln w="12700">
+            <a:solidFill>
+              <a:srgbClr val="DC2626"/>
             </a:solidFill>
             <a:prstDash val="solid"/>
           </a:ln>
@@ -36610,13 +36307,13 @@
             <a:r>
               <a:rPr lang="en-US" sz="1100" b="1" dirty="0">
                 <a:solidFill>
-                  <a:srgbClr val="16A34A"/>
+                  <a:srgbClr val="DC2626"/>
                 </a:solidFill>
                 <a:latin typeface="Trebuchet MS" pitchFamily="34" charset="0"/>
                 <a:ea typeface="Trebuchet MS" pitchFamily="34" charset="-122"/>
                 <a:cs typeface="Trebuchet MS" pitchFamily="34" charset="-120"/>
               </a:rPr>
-              <a:t>TRUE</a:t>
+              <a:t>FALSE</a:t>
             </a:r>
             <a:endParaRPr lang="en-US" sz="1100" dirty="0"/>
           </a:p>
@@ -36689,7 +36386,7 @@
                 <a:ea typeface="Calibri" pitchFamily="34" charset="-122"/>
                 <a:cs typeface="Calibri" pitchFamily="34" charset="-120"/>
               </a:rPr>
-              <a:t>4.  The suffix '-ful' comes from Old English.</a:t>
+              <a:t>4.  The word 'careful' contains the suffix '-ful'.</a:t>
             </a:r>
             <a:endParaRPr lang="en-US" sz="1300" dirty="0"/>
           </a:p>
@@ -36828,7 +36525,7 @@
                 <a:ea typeface="Calibri" pitchFamily="34" charset="-122"/>
                 <a:cs typeface="Calibri" pitchFamily="34" charset="-120"/>
               </a:rPr>
-              <a:t>5.  Every word ending in '-ful' must have a prefix before the base word.</a:t>
+              <a:t>5.  Adding '-ful' to 'hope' makes the word 'hopeful'.</a:t>
             </a:r>
             <a:endParaRPr lang="en-US" sz="1300" dirty="0"/>
           </a:p>
@@ -36851,11 +36548,11 @@
             </a:avLst>
           </a:prstGeom>
           <a:solidFill>
-            <a:srgbClr val="FEE2E2"/>
-          </a:solidFill>
-          <a:ln w="12700">
-            <a:solidFill>
-              <a:srgbClr val="DC2626"/>
+            <a:srgbClr val="DCFCE7"/>
+          </a:solidFill>
+          <a:ln w="12700">
+            <a:solidFill>
+              <a:srgbClr val="16A34A"/>
             </a:solidFill>
             <a:prstDash val="solid"/>
           </a:ln>
@@ -36888,13 +36585,13 @@
             <a:r>
               <a:rPr lang="en-US" sz="1100" b="1" dirty="0">
                 <a:solidFill>
-                  <a:srgbClr val="DC2626"/>
+                  <a:srgbClr val="16A34A"/>
                 </a:solidFill>
                 <a:latin typeface="Trebuchet MS" pitchFamily="34" charset="0"/>
                 <a:ea typeface="Trebuchet MS" pitchFamily="34" charset="-122"/>
                 <a:cs typeface="Trebuchet MS" pitchFamily="34" charset="-120"/>
               </a:rPr>
-              <a:t>FALSE</a:t>
+              <a:t>TRUE</a:t>
             </a:r>
             <a:endParaRPr lang="en-US" sz="1100" dirty="0"/>
           </a:p>
@@ -37467,7 +37164,7 @@
                 <a:ea typeface="Trebuchet MS" pitchFamily="34" charset="-122"/>
                 <a:cs typeface="Trebuchet MS" pitchFamily="34" charset="-120"/>
               </a:rPr>
-              <a:t>helpful</a:t>
+              <a:t>hopeful</a:t>
             </a:r>
             <a:endParaRPr lang="en-US" sz="1300" dirty="0"/>
           </a:p>
@@ -37533,7 +37230,7 @@
                 <a:ea typeface="Trebuchet MS" pitchFamily="34" charset="-122"/>
                 <a:cs typeface="Trebuchet MS" pitchFamily="34" charset="-120"/>
               </a:rPr>
-              <a:t>powerful</a:t>
+              <a:t>careful</a:t>
             </a:r>
             <a:endParaRPr lang="en-US" sz="1300" dirty="0"/>
           </a:p>
@@ -37599,7 +37296,7 @@
                 <a:ea typeface="Trebuchet MS" pitchFamily="34" charset="-122"/>
                 <a:cs typeface="Trebuchet MS" pitchFamily="34" charset="-120"/>
               </a:rPr>
-              <a:t>hopeful</a:t>
+              <a:t>powerful</a:t>
             </a:r>
             <a:endParaRPr lang="en-US" sz="1300" dirty="0"/>
           </a:p>
@@ -37665,7 +37362,7 @@
                 <a:ea typeface="Trebuchet MS" pitchFamily="34" charset="-122"/>
                 <a:cs typeface="Trebuchet MS" pitchFamily="34" charset="-120"/>
               </a:rPr>
-              <a:t>careful</a:t>
+              <a:t>playful</a:t>
             </a:r>
             <a:endParaRPr lang="en-US" sz="1300" dirty="0"/>
           </a:p>
@@ -37731,7 +37428,7 @@
                 <a:ea typeface="Trebuchet MS" pitchFamily="34" charset="-122"/>
                 <a:cs typeface="Trebuchet MS" pitchFamily="34" charset="-120"/>
               </a:rPr>
-              <a:t>playful</a:t>
+              <a:t>harmful</a:t>
             </a:r>
             <a:endParaRPr lang="en-US" sz="1300" dirty="0"/>
           </a:p>
@@ -37797,7 +37494,7 @@
                 <a:ea typeface="Trebuchet MS" pitchFamily="34" charset="-122"/>
                 <a:cs typeface="Trebuchet MS" pitchFamily="34" charset="-120"/>
               </a:rPr>
-              <a:t>thankful</a:t>
+              <a:t>grateful</a:t>
             </a:r>
             <a:endParaRPr lang="en-US" sz="1300" dirty="0"/>
           </a:p>
@@ -37863,7 +37560,7 @@
                 <a:ea typeface="Trebuchet MS" pitchFamily="34" charset="-122"/>
                 <a:cs typeface="Trebuchet MS" pitchFamily="34" charset="-120"/>
               </a:rPr>
-              <a:t>colourful</a:t>
+              <a:t>cheerful</a:t>
             </a:r>
             <a:endParaRPr lang="en-US" sz="1300" dirty="0"/>
           </a:p>
@@ -38954,7 +38651,7 @@
                 <a:ea typeface="Trebuchet MS" pitchFamily="34" charset="-122"/>
                 <a:cs typeface="Trebuchet MS" pitchFamily="34" charset="-120"/>
               </a:rPr>
-              <a:t>mis-</a:t>
+              <a:t>dis-</a:t>
             </a:r>
             <a:endParaRPr lang="en-US" sz="1300" dirty="0"/>
           </a:p>
@@ -39107,7 +38804,7 @@
                 <a:ea typeface="Trebuchet MS" pitchFamily="34" charset="-122"/>
                 <a:cs typeface="Trebuchet MS" pitchFamily="34" charset="-120"/>
               </a:rPr>
-              <a:t>dis-</a:t>
+              <a:t>mis-</a:t>
             </a:r>
             <a:endParaRPr lang="en-US" sz="1300" dirty="0"/>
           </a:p>
@@ -39637,7 +39334,7 @@
                 <a:ea typeface="Trebuchet MS" pitchFamily="34" charset="-122"/>
                 <a:cs typeface="Trebuchet MS" pitchFamily="34" charset="-120"/>
               </a:rPr>
-              <a:t>helpful</a:t>
+              <a:t>hopeful</a:t>
             </a:r>
             <a:endParaRPr lang="en-US" sz="1400" dirty="0"/>
           </a:p>
@@ -40041,7 +39738,7 @@
                 <a:ea typeface="Trebuchet MS" pitchFamily="34" charset="-122"/>
                 <a:cs typeface="Trebuchet MS" pitchFamily="34" charset="-120"/>
               </a:rPr>
-              <a:t>helpful</a:t>
+              <a:t>hopeful</a:t>
             </a:r>
             <a:endParaRPr lang="en-US" sz="1200" dirty="0"/>
           </a:p>
@@ -40107,7 +39804,7 @@
                 <a:ea typeface="Calibri" pitchFamily="34" charset="-122"/>
                 <a:cs typeface="Calibri" pitchFamily="34" charset="-120"/>
               </a:rPr>
-              <a:t>Ready to help others; making things easier for someone.</a:t>
+              <a:t>Feeling that something good will happen.</a:t>
             </a:r>
             <a:endParaRPr lang="en-US" sz="1200" dirty="0"/>
           </a:p>
@@ -40180,7 +39877,7 @@
                 <a:ea typeface="Trebuchet MS" pitchFamily="34" charset="-122"/>
                 <a:cs typeface="Trebuchet MS" pitchFamily="34" charset="-120"/>
               </a:rPr>
-              <a:t>powerful</a:t>
+              <a:t>careful</a:t>
             </a:r>
             <a:endParaRPr lang="en-US" sz="1200" dirty="0"/>
           </a:p>
@@ -40246,7 +39943,7 @@
                 <a:ea typeface="Calibri" pitchFamily="34" charset="-122"/>
                 <a:cs typeface="Calibri" pitchFamily="34" charset="-120"/>
               </a:rPr>
-              <a:t>Paying close attention so you don't make mistakes or cause harm.</a:t>
+              <a:t>Enjoying fun and games; full of energy and fun.</a:t>
             </a:r>
             <a:endParaRPr lang="en-US" sz="1200" dirty="0"/>
           </a:p>
@@ -40319,7 +40016,7 @@
                 <a:ea typeface="Trebuchet MS" pitchFamily="34" charset="-122"/>
                 <a:cs typeface="Trebuchet MS" pitchFamily="34" charset="-120"/>
               </a:rPr>
-              <a:t>hopeful</a:t>
+              <a:t>powerful</a:t>
             </a:r>
             <a:endParaRPr lang="en-US" sz="1200" dirty="0"/>
           </a:p>
@@ -40385,7 +40082,7 @@
                 <a:ea typeface="Calibri" pitchFamily="34" charset="-122"/>
                 <a:cs typeface="Calibri" pitchFamily="34" charset="-120"/>
               </a:rPr>
-              <a:t>Feeling like something good is likely to happen.</a:t>
+              <a:t>Having great strength or force.</a:t>
             </a:r>
             <a:endParaRPr lang="en-US" sz="1200" dirty="0"/>
           </a:p>
@@ -40458,7 +40155,7 @@
                 <a:ea typeface="Trebuchet MS" pitchFamily="34" charset="-122"/>
                 <a:cs typeface="Trebuchet MS" pitchFamily="34" charset="-120"/>
               </a:rPr>
-              <a:t>careful</a:t>
+              <a:t>playful</a:t>
             </a:r>
             <a:endParaRPr lang="en-US" sz="1200" dirty="0"/>
           </a:p>
@@ -40524,7 +40221,7 @@
                 <a:ea typeface="Calibri" pitchFamily="34" charset="-122"/>
                 <a:cs typeface="Calibri" pitchFamily="34" charset="-120"/>
               </a:rPr>
-              <a:t>Full of fun and energy; enjoying games and jokes.</a:t>
+              <a:t>Able to cause damage or hurt to someone or something.</a:t>
             </a:r>
             <a:endParaRPr lang="en-US" sz="1200" dirty="0"/>
           </a:p>
@@ -40597,7 +40294,7 @@
                 <a:ea typeface="Trebuchet MS" pitchFamily="34" charset="-122"/>
                 <a:cs typeface="Trebuchet MS" pitchFamily="34" charset="-120"/>
               </a:rPr>
-              <a:t>playful</a:t>
+              <a:t>harmful</a:t>
             </a:r>
             <a:endParaRPr lang="en-US" sz="1200" dirty="0"/>
           </a:p>
@@ -40663,7 +40360,7 @@
                 <a:ea typeface="Calibri" pitchFamily="34" charset="-122"/>
                 <a:cs typeface="Calibri" pitchFamily="34" charset="-120"/>
               </a:rPr>
-              <a:t>Having lots of bright, vivid colours.</a:t>
+              <a:t>Noticeably happy and full of good spirits.</a:t>
             </a:r>
             <a:endParaRPr lang="en-US" sz="1200" dirty="0"/>
           </a:p>
@@ -40736,7 +40433,7 @@
                 <a:ea typeface="Trebuchet MS" pitchFamily="34" charset="-122"/>
                 <a:cs typeface="Trebuchet MS" pitchFamily="34" charset="-120"/>
               </a:rPr>
-              <a:t>thankful</a:t>
+              <a:t>grateful</a:t>
             </a:r>
             <a:endParaRPr lang="en-US" sz="1200" dirty="0"/>
           </a:p>
@@ -40802,7 +40499,7 @@
                 <a:ea typeface="Calibri" pitchFamily="34" charset="-122"/>
                 <a:cs typeface="Calibri" pitchFamily="34" charset="-120"/>
               </a:rPr>
-              <a:t>Feeling glad and grateful for something good.</a:t>
+              <a:t>Feeling thankful for something kind someone has done.</a:t>
             </a:r>
             <a:endParaRPr lang="en-US" sz="1200" dirty="0"/>
           </a:p>
@@ -40875,7 +40572,7 @@
                 <a:ea typeface="Trebuchet MS" pitchFamily="34" charset="-122"/>
                 <a:cs typeface="Trebuchet MS" pitchFamily="34" charset="-120"/>
               </a:rPr>
-              <a:t>colourful</a:t>
+              <a:t>cheerful</a:t>
             </a:r>
             <a:endParaRPr lang="en-US" sz="1200" dirty="0"/>
           </a:p>
@@ -40941,7 +40638,7 @@
                 <a:ea typeface="Calibri" pitchFamily="34" charset="-122"/>
                 <a:cs typeface="Calibri" pitchFamily="34" charset="-120"/>
               </a:rPr>
-              <a:t>Having a lot of strength or ability to do great things.</a:t>
+              <a:t>Giving close attention to avoid mistakes or danger.</a:t>
             </a:r>
             <a:endParaRPr lang="en-US" sz="1200" dirty="0"/>
           </a:p>
@@ -41436,7 +41133,7 @@
                 <a:ea typeface="Calibri" pitchFamily="34" charset="-122"/>
                 <a:cs typeface="Calibri" pitchFamily="34" charset="-120"/>
               </a:rPr>
-              <a:t>Mia was careful not to spill the paint when she carried it across the classroom.</a:t>
+              <a:t>The cheerful puppy wagged its tail and made everyone in the room smile.</a:t>
             </a:r>
             <a:endParaRPr lang="en-US" sz="1500" dirty="0"/>
           </a:p>
@@ -41600,7 +41297,7 @@
                 <a:ea typeface="Calibri" pitchFamily="34" charset="-122"/>
                 <a:cs typeface="Calibri" pitchFamily="34" charset="-120"/>
               </a:rPr>
-              <a:t>The colourful butterfly landed on the windowsill during our science lesson.</a:t>
+              <a:t>We must be careful when crossing a busy road.</a:t>
             </a:r>
             <a:endParaRPr lang="en-US" sz="1500" dirty="0"/>
           </a:p>
@@ -41764,7 +41461,7 @@
                 <a:ea typeface="Calibri" pitchFamily="34" charset="-122"/>
                 <a:cs typeface="Calibri" pitchFamily="34" charset="-120"/>
               </a:rPr>
-              <a:t>Everyone felt hopeful after the team practised hard for the big game.</a:t>
+              <a:t>The powerful storm knocked down several large trees in the park.</a:t>
             </a:r>
             <a:endParaRPr lang="en-US" sz="1500" dirty="0"/>
           </a:p>
